--- a/downloads/learning/kyle-hobson-learning-deck.pptx
+++ b/downloads/learning/kyle-hobson-learning-deck.pptx
@@ -2,22 +2,22 @@
 <file path=ppt/presentation.xml><?xml version="1.0" encoding="utf-8"?>
 <p:presentation xmlns:p="http://schemas.openxmlformats.org/presentationml/2006/main">
   <p:sldMasterIdLst>
-    <p:sldMasterId xmlns:r="http://schemas.openxmlformats.org/officeDocument/2006/relationships" id="2147483648" r:id="R430c4109af8a4bf9"/>
+    <p:sldMasterId xmlns:r="http://schemas.openxmlformats.org/officeDocument/2006/relationships" id="2147483648" r:id="R6488ad5345e64e75"/>
   </p:sldMasterIdLst>
   <p:notesMasterIdLst>
-    <p:notesMasterId xmlns:r="http://schemas.openxmlformats.org/officeDocument/2006/relationships" r:id="Rd9190fbf594c42c0"/>
+    <p:notesMasterId xmlns:r="http://schemas.openxmlformats.org/officeDocument/2006/relationships" r:id="Re8ff124ab49e4cae"/>
   </p:notesMasterIdLst>
   <p:sldIdLst>
-    <p:sldId xmlns:r="http://schemas.openxmlformats.org/officeDocument/2006/relationships" id="256" r:id="R3870cbfa9b95439a"/>
-    <p:sldId xmlns:r="http://schemas.openxmlformats.org/officeDocument/2006/relationships" id="257" r:id="Rf04be3bcd03945ef"/>
-    <p:sldId xmlns:r="http://schemas.openxmlformats.org/officeDocument/2006/relationships" id="258" r:id="Rf67cd7f4033e41a3"/>
-    <p:sldId xmlns:r="http://schemas.openxmlformats.org/officeDocument/2006/relationships" id="259" r:id="R42299ec2867f470c"/>
-    <p:sldId xmlns:r="http://schemas.openxmlformats.org/officeDocument/2006/relationships" id="260" r:id="Rc6b5f5def96a4e97"/>
-    <p:sldId xmlns:r="http://schemas.openxmlformats.org/officeDocument/2006/relationships" id="261" r:id="R08a9b8399b1e4e04"/>
-    <p:sldId xmlns:r="http://schemas.openxmlformats.org/officeDocument/2006/relationships" id="262" r:id="R6f7db9cbf0194a0f"/>
-    <p:sldId xmlns:r="http://schemas.openxmlformats.org/officeDocument/2006/relationships" id="263" r:id="R7121fb423b474f5e"/>
-    <p:sldId xmlns:r="http://schemas.openxmlformats.org/officeDocument/2006/relationships" id="264" r:id="Re40887c6c623491a"/>
-    <p:sldId xmlns:r="http://schemas.openxmlformats.org/officeDocument/2006/relationships" id="265" r:id="R39edf006bf15411e"/>
+    <p:sldId xmlns:r="http://schemas.openxmlformats.org/officeDocument/2006/relationships" id="256" r:id="R30519bcc9ae44330"/>
+    <p:sldId xmlns:r="http://schemas.openxmlformats.org/officeDocument/2006/relationships" id="257" r:id="Ra375f1bb1d4a404b"/>
+    <p:sldId xmlns:r="http://schemas.openxmlformats.org/officeDocument/2006/relationships" id="258" r:id="Rae71df4f288b4f65"/>
+    <p:sldId xmlns:r="http://schemas.openxmlformats.org/officeDocument/2006/relationships" id="259" r:id="R70b6a96ff37e462c"/>
+    <p:sldId xmlns:r="http://schemas.openxmlformats.org/officeDocument/2006/relationships" id="260" r:id="R07e0e9c86fb440d7"/>
+    <p:sldId xmlns:r="http://schemas.openxmlformats.org/officeDocument/2006/relationships" id="261" r:id="Rbfb258ac8d5a494a"/>
+    <p:sldId xmlns:r="http://schemas.openxmlformats.org/officeDocument/2006/relationships" id="262" r:id="R305ea57dcf7145ff"/>
+    <p:sldId xmlns:r="http://schemas.openxmlformats.org/officeDocument/2006/relationships" id="263" r:id="R6be93adb66ef4b4f"/>
+    <p:sldId xmlns:r="http://schemas.openxmlformats.org/officeDocument/2006/relationships" id="264" r:id="R9418aa0d20914d00"/>
+    <p:sldId xmlns:r="http://schemas.openxmlformats.org/officeDocument/2006/relationships" id="265" r:id="R6a76223868d543a3"/>
   </p:sldIdLst>
   <p:sldSz cx="12192000" cy="6858000"/>
   <p:notesSz cx="6858000" cy="9144000"/>
@@ -451,7 +451,7 @@
           <a:lstStyle xmlns:a="http://schemas.openxmlformats.org/drawingml/2006/main"/>
           <a:p xmlns:a="http://schemas.openxmlformats.org/drawingml/2006/main">
             <a:r>
-              <a:t>Selected learning-design and facilitation work by Jonathan Kyle Hobson. Sources: published Coursera Guided Project and original course artifacts, 2025 KeepMake workshop records and photos, and a 2024 ASU learner-support proposal. Decorative cover artwork is part of the existing portfolio design family and is not project evidence.</a:t>
+              <a:t>Selected learning-design and facilitation work by Jonathan Kyle Hobson. Sources: published Coursera Guided Project and original course artifacts, 2025 KeepMake workshop records and original collaborative-sketching photo, and a 2024 ASU learner-support proposal. The cover shows team-generated work on a Board of Innovation worksheet. My contribution was the activity sequence, documentation and synthesis support; the team generated the ideas.</a:t>
             </a:r>
           </a:p>
         </p:txBody>
@@ -1149,7 +1149,7 @@
   </p:cSld>
   <p:clrMap bg1="lt1" tx1="dk1" bg2="lt2" tx2="dk2" accent1="accent1" accent2="accent2" accent3="accent3" accent4="accent4" accent5="accent5" accent6="accent6" hlink="hlink" folHlink="folHlink"/>
   <p:sldLayoutIdLst>
-    <p:sldLayoutId xmlns:r="http://schemas.openxmlformats.org/officeDocument/2006/relationships" id="2147483649" r:id="Rf053328b08f0462d"/>
+    <p:sldLayoutId xmlns:r="http://schemas.openxmlformats.org/officeDocument/2006/relationships" id="2147483649" r:id="Re542311b4ad24e59"/>
   </p:sldLayoutIdLst>
   <p:txStyles>
     <p:titleStyle>
@@ -1695,25 +1695,313 @@
       <p:grpSpPr>
         <a:xfrm xmlns:a="http://schemas.openxmlformats.org/drawingml/2006/main"/>
       </p:grpSpPr>
+      <p:sp>
+        <p:nvSpPr>
+          <p:cNvPr id="8" name="section-label">
+            <a:extLst xmlns:a="http://schemas.openxmlformats.org/drawingml/2006/main">
+              <a:ext uri="{FF2B5EF4-FFF2-40B4-BE49-F238E27FC236}">
+                <a16:creationId xmlns:a16="http://schemas.microsoft.com/office/drawing/2014/main" id="{2808601C-2704-46E5-8BC6-A91A3E63C85F}"/>
+              </a:ext>
+            </a:extLst>
+          </p:cNvPr>
+          <p:cNvSpPr>
+            <a:spLocks xmlns:a="http://schemas.openxmlformats.org/drawingml/2006/main" noGrp="1"/>
+          </p:cNvSpPr>
+          <p:nvPr/>
+        </p:nvSpPr>
+        <p:spPr>
+          <a:xfrm xmlns:a="http://schemas.openxmlformats.org/drawingml/2006/main">
+            <a:off x="609600" y="514350"/>
+            <a:ext cx="10763250" cy="266700"/>
+          </a:xfrm>
+          <a:prstGeom xmlns:a="http://schemas.openxmlformats.org/drawingml/2006/main" prst="rect">
+            <a:avLst/>
+          </a:prstGeom>
+          <a:noFill xmlns:a="http://schemas.openxmlformats.org/drawingml/2006/main"/>
+          <a:ln xmlns:a="http://schemas.openxmlformats.org/drawingml/2006/main" w="0">
+            <a:noFill/>
+          </a:ln>
+        </p:spPr>
+        <p:txBody>
+          <a:bodyPr xmlns:a="http://schemas.openxmlformats.org/drawingml/2006/main" wrap="square" lIns="0" tIns="0" rIns="0" bIns="0" anchor="t">
+            <a:noAutofit/>
+          </a:bodyPr>
+          <a:lstStyle xmlns:a="http://schemas.openxmlformats.org/drawingml/2006/main"/>
+          <a:p xmlns:a="http://schemas.openxmlformats.org/drawingml/2006/main">
+            <a:pPr>
+              <a:lnSpc>
+                <a:spcPct val="110000"/>
+              </a:lnSpc>
+              <a:buNone/>
+              <a:defRPr sz="1200" b="1">
+                <a:solidFill>
+                  <a:srgbClr val="244D3C"/>
+                </a:solidFill>
+                <a:latin typeface="Helvetica Neue"/>
+                <a:ea typeface="Helvetica Neue"/>
+                <a:cs typeface="Helvetica Neue"/>
+              </a:defRPr>
+            </a:pPr>
+            <a:r>
+              <a:rPr sz="1200" b="1">
+                <a:solidFill>
+                  <a:srgbClr val="244D3C"/>
+                </a:solidFill>
+                <a:latin typeface="Helvetica Neue"/>
+                <a:ea typeface="Helvetica Neue"/>
+                <a:cs typeface="Helvetica Neue"/>
+              </a:rPr>
+              <a:t>KYLE HOBSON   /   LEARNING &amp; FACILITATION</a:t>
+            </a:r>
+          </a:p>
+        </p:txBody>
+      </p:sp>
+      <p:sp>
+        <p:nvSpPr>
+          <p:cNvPr id="2" name="headline">
+            <a:extLst xmlns:a="http://schemas.openxmlformats.org/drawingml/2006/main">
+              <a:ext uri="{FF2B5EF4-FFF2-40B4-BE49-F238E27FC236}">
+                <a16:creationId xmlns:a16="http://schemas.microsoft.com/office/drawing/2014/main" id="{F4E1CA2B-1326-43F7-88F0-1F0C5A99FA2E}"/>
+              </a:ext>
+            </a:extLst>
+          </p:cNvPr>
+          <p:cNvSpPr>
+            <a:spLocks xmlns:a="http://schemas.openxmlformats.org/drawingml/2006/main" noGrp="1"/>
+          </p:cNvSpPr>
+          <p:nvPr/>
+        </p:nvSpPr>
+        <p:spPr>
+          <a:xfrm xmlns:a="http://schemas.openxmlformats.org/drawingml/2006/main">
+            <a:off x="609600" y="1552575"/>
+            <a:ext cx="5686425" cy="2200275"/>
+          </a:xfrm>
+          <a:prstGeom xmlns:a="http://schemas.openxmlformats.org/drawingml/2006/main" prst="rect">
+            <a:avLst/>
+          </a:prstGeom>
+          <a:noFill xmlns:a="http://schemas.openxmlformats.org/drawingml/2006/main"/>
+          <a:ln xmlns:a="http://schemas.openxmlformats.org/drawingml/2006/main" w="0">
+            <a:noFill/>
+          </a:ln>
+        </p:spPr>
+        <p:txBody>
+          <a:bodyPr xmlns:a="http://schemas.openxmlformats.org/drawingml/2006/main" wrap="square" lIns="0" tIns="0" rIns="0" bIns="0" anchor="t">
+            <a:noAutofit/>
+          </a:bodyPr>
+          <a:lstStyle xmlns:a="http://schemas.openxmlformats.org/drawingml/2006/main"/>
+          <a:p xmlns:a="http://schemas.openxmlformats.org/drawingml/2006/main">
+            <a:pPr>
+              <a:lnSpc>
+                <a:spcPct val="110000"/>
+              </a:lnSpc>
+              <a:buNone/>
+              <a:defRPr sz="4200" b="1">
+                <a:solidFill>
+                  <a:srgbClr val="192B25"/>
+                </a:solidFill>
+                <a:latin typeface="Helvetica Neue"/>
+                <a:ea typeface="Helvetica Neue"/>
+                <a:cs typeface="Helvetica Neue"/>
+              </a:defRPr>
+            </a:pPr>
+            <a:r>
+              <a:rPr sz="4200" b="1">
+                <a:solidFill>
+                  <a:srgbClr val="192B25"/>
+                </a:solidFill>
+                <a:latin typeface="Helvetica Neue"/>
+                <a:ea typeface="Helvetica Neue"/>
+                <a:cs typeface="Helvetica Neue"/>
+              </a:rPr>
+              <a:t>Make the next step</a:t>
+            </a:r>
+          </a:p>
+          <a:p xmlns:a="http://schemas.openxmlformats.org/drawingml/2006/main">
+            <a:pPr>
+              <a:lnSpc>
+                <a:spcPct val="110000"/>
+              </a:lnSpc>
+              <a:buNone/>
+              <a:defRPr sz="4200" b="1">
+                <a:solidFill>
+                  <a:srgbClr val="192B25"/>
+                </a:solidFill>
+                <a:latin typeface="Helvetica Neue"/>
+                <a:ea typeface="Helvetica Neue"/>
+                <a:cs typeface="Helvetica Neue"/>
+              </a:defRPr>
+            </a:pPr>
+            <a:r>
+              <a:rPr sz="4200" b="1">
+                <a:solidFill>
+                  <a:srgbClr val="192B25"/>
+                </a:solidFill>
+                <a:latin typeface="Helvetica Neue"/>
+                <a:ea typeface="Helvetica Neue"/>
+                <a:cs typeface="Helvetica Neue"/>
+              </a:rPr>
+              <a:t>something people</a:t>
+            </a:r>
+          </a:p>
+          <a:p xmlns:a="http://schemas.openxmlformats.org/drawingml/2006/main">
+            <a:pPr>
+              <a:lnSpc>
+                <a:spcPct val="110000"/>
+              </a:lnSpc>
+              <a:buNone/>
+              <a:defRPr sz="4200" b="1">
+                <a:solidFill>
+                  <a:srgbClr val="192B25"/>
+                </a:solidFill>
+                <a:latin typeface="Helvetica Neue"/>
+                <a:ea typeface="Helvetica Neue"/>
+                <a:cs typeface="Helvetica Neue"/>
+              </a:defRPr>
+            </a:pPr>
+            <a:r>
+              <a:rPr sz="4200" b="1">
+                <a:solidFill>
+                  <a:srgbClr val="192B25"/>
+                </a:solidFill>
+                <a:latin typeface="Helvetica Neue"/>
+                <a:ea typeface="Helvetica Neue"/>
+                <a:cs typeface="Helvetica Neue"/>
+              </a:rPr>
+              <a:t>can do</a:t>
+            </a:r>
+          </a:p>
+        </p:txBody>
+      </p:sp>
+      <p:sp>
+        <p:nvSpPr>
+          <p:cNvPr id="3" name="intro">
+            <a:extLst xmlns:a="http://schemas.openxmlformats.org/drawingml/2006/main">
+              <a:ext uri="{FF2B5EF4-FFF2-40B4-BE49-F238E27FC236}">
+                <a16:creationId xmlns:a16="http://schemas.microsoft.com/office/drawing/2014/main" id="{A3F8FD35-046E-4F3E-8E38-56F3B1FA8A1A}"/>
+              </a:ext>
+            </a:extLst>
+          </p:cNvPr>
+          <p:cNvSpPr>
+            <a:spLocks xmlns:a="http://schemas.openxmlformats.org/drawingml/2006/main" noGrp="1"/>
+          </p:cNvSpPr>
+          <p:nvPr/>
+        </p:nvSpPr>
+        <p:spPr>
+          <a:xfrm xmlns:a="http://schemas.openxmlformats.org/drawingml/2006/main">
+            <a:off x="647700" y="4305300"/>
+            <a:ext cx="5572125" cy="1200150"/>
+          </a:xfrm>
+          <a:prstGeom xmlns:a="http://schemas.openxmlformats.org/drawingml/2006/main" prst="rect">
+            <a:avLst/>
+          </a:prstGeom>
+          <a:noFill xmlns:a="http://schemas.openxmlformats.org/drawingml/2006/main"/>
+          <a:ln xmlns:a="http://schemas.openxmlformats.org/drawingml/2006/main" w="0">
+            <a:noFill/>
+          </a:ln>
+        </p:spPr>
+        <p:txBody>
+          <a:bodyPr xmlns:a="http://schemas.openxmlformats.org/drawingml/2006/main" wrap="square" lIns="0" tIns="0" rIns="0" bIns="0" anchor="t">
+            <a:noAutofit/>
+          </a:bodyPr>
+          <a:lstStyle xmlns:a="http://schemas.openxmlformats.org/drawingml/2006/main"/>
+          <a:p xmlns:a="http://schemas.openxmlformats.org/drawingml/2006/main">
+            <a:pPr>
+              <a:lnSpc>
+                <a:spcPct val="110000"/>
+              </a:lnSpc>
+              <a:buNone/>
+              <a:defRPr sz="1950" b="0">
+                <a:solidFill>
+                  <a:srgbClr val="192B25"/>
+                </a:solidFill>
+                <a:latin typeface="Helvetica Neue"/>
+                <a:ea typeface="Helvetica Neue"/>
+                <a:cs typeface="Helvetica Neue"/>
+              </a:defRPr>
+            </a:pPr>
+            <a:r>
+              <a:rPr sz="1950" b="0">
+                <a:solidFill>
+                  <a:srgbClr val="192B25"/>
+                </a:solidFill>
+                <a:latin typeface="Helvetica Neue"/>
+                <a:ea typeface="Helvetica Neue"/>
+                <a:cs typeface="Helvetica Neue"/>
+              </a:rPr>
+              <a:t>Instructional design, hands-on AI teaching,</a:t>
+            </a:r>
+          </a:p>
+          <a:p xmlns:a="http://schemas.openxmlformats.org/drawingml/2006/main">
+            <a:pPr>
+              <a:lnSpc>
+                <a:spcPct val="110000"/>
+              </a:lnSpc>
+              <a:buNone/>
+              <a:defRPr sz="1950" b="0">
+                <a:solidFill>
+                  <a:srgbClr val="192B25"/>
+                </a:solidFill>
+                <a:latin typeface="Helvetica Neue"/>
+                <a:ea typeface="Helvetica Neue"/>
+                <a:cs typeface="Helvetica Neue"/>
+              </a:defRPr>
+            </a:pPr>
+            <a:r>
+              <a:rPr sz="1950" b="0">
+                <a:solidFill>
+                  <a:srgbClr val="192B25"/>
+                </a:solidFill>
+                <a:latin typeface="Helvetica Neue"/>
+                <a:ea typeface="Helvetica Neue"/>
+                <a:cs typeface="Helvetica Neue"/>
+              </a:rPr>
+              <a:t>and workshops that leave a team</a:t>
+            </a:r>
+          </a:p>
+          <a:p xmlns:a="http://schemas.openxmlformats.org/drawingml/2006/main">
+            <a:pPr>
+              <a:lnSpc>
+                <a:spcPct val="110000"/>
+              </a:lnSpc>
+              <a:buNone/>
+              <a:defRPr sz="1950" b="0">
+                <a:solidFill>
+                  <a:srgbClr val="192B25"/>
+                </a:solidFill>
+                <a:latin typeface="Helvetica Neue"/>
+                <a:ea typeface="Helvetica Neue"/>
+                <a:cs typeface="Helvetica Neue"/>
+              </a:defRPr>
+            </a:pPr>
+            <a:r>
+              <a:rPr sz="1950" b="0">
+                <a:solidFill>
+                  <a:srgbClr val="192B25"/>
+                </a:solidFill>
+                <a:latin typeface="Helvetica Neue"/>
+                <a:ea typeface="Helvetica Neue"/>
+                <a:cs typeface="Helvetica Neue"/>
+              </a:rPr>
+              <a:t>something to build on.</a:t>
+            </a:r>
+          </a:p>
+        </p:txBody>
+      </p:sp>
       <p:pic>
         <p:nvPicPr>
-          <p:cNvPr id="7" name=""/>
+          <p:cNvPr id="11" name=""/>
           <p:cNvPicPr>
             <a:picLocks xmlns:a="http://schemas.openxmlformats.org/drawingml/2006/main" noChangeAspect="1"/>
           </p:cNvPicPr>
           <p:nvPr/>
         </p:nvPicPr>
         <p:blipFill>
-          <a:blip xmlns:r="http://schemas.openxmlformats.org/officeDocument/2006/relationships" xmlns:a="http://schemas.openxmlformats.org/drawingml/2006/main" r:embed="R70c69a5cb3ab45f2"/>
-          <a:srcRect xmlns:a="http://schemas.openxmlformats.org/drawingml/2006/main" l="0" t="7813" r="0" b="7813"/>
-          <a:stretch xmlns:a="http://schemas.openxmlformats.org/drawingml/2006/main">
-            <a:fillRect l="0" t="0" r="0" b="0"/>
-          </a:stretch>
+          <a:blip xmlns:r="http://schemas.openxmlformats.org/officeDocument/2006/relationships" xmlns:a="http://schemas.openxmlformats.org/drawingml/2006/main" r:embed="R75bda9c063e14748"/>
+          <a:stretch xmlns:a="http://schemas.openxmlformats.org/drawingml/2006/main"/>
         </p:blipFill>
         <p:spPr>
           <a:xfrm xmlns:a="http://schemas.openxmlformats.org/drawingml/2006/main">
-            <a:off x="0" y="0"/>
-            <a:ext cx="12192000" cy="6858000"/>
+            <a:off x="6667500" y="1657350"/>
+            <a:ext cx="4914900" cy="3686175"/>
           </a:xfrm>
           <a:prstGeom xmlns:a="http://schemas.openxmlformats.org/drawingml/2006/main" prst="rect">
             <a:avLst/>
@@ -1722,22 +2010,22 @@
       </p:pic>
       <p:sp>
         <p:nvSpPr>
-          <p:cNvPr id="2" name="section-label">
-            <a:extLst xmlns:a="http://schemas.openxmlformats.org/drawingml/2006/main">
-              <a:ext uri="{FF2B5EF4-FFF2-40B4-BE49-F238E27FC236}">
-                <a16:creationId xmlns:a16="http://schemas.microsoft.com/office/drawing/2014/main" id="{29E781B6-0005-4A5B-BB2E-678ACCDC64BA}"/>
-              </a:ext>
-            </a:extLst>
-          </p:cNvPr>
-          <p:cNvSpPr>
-            <a:spLocks xmlns:a="http://schemas.openxmlformats.org/drawingml/2006/main" noGrp="1"/>
-          </p:cNvSpPr>
-          <p:nvPr/>
-        </p:nvSpPr>
-        <p:spPr>
-          <a:xfrm xmlns:a="http://schemas.openxmlformats.org/drawingml/2006/main">
-            <a:off x="609600" y="514350"/>
-            <a:ext cx="10763250" cy="266700"/>
+          <p:cNvPr id="5" name="cover-source">
+            <a:extLst xmlns:a="http://schemas.openxmlformats.org/drawingml/2006/main">
+              <a:ext uri="{FF2B5EF4-FFF2-40B4-BE49-F238E27FC236}">
+                <a16:creationId xmlns:a16="http://schemas.microsoft.com/office/drawing/2014/main" id="{18FEC97A-CE0C-402C-88B7-B44E39ED7AE2}"/>
+              </a:ext>
+            </a:extLst>
+          </p:cNvPr>
+          <p:cNvSpPr>
+            <a:spLocks xmlns:a="http://schemas.openxmlformats.org/drawingml/2006/main" noGrp="1"/>
+          </p:cNvSpPr>
+          <p:nvPr/>
+        </p:nvSpPr>
+        <p:spPr>
+          <a:xfrm xmlns:a="http://schemas.openxmlformats.org/drawingml/2006/main">
+            <a:off x="6667500" y="5581650"/>
+            <a:ext cx="4914900" cy="628650"/>
           </a:xfrm>
           <a:prstGeom xmlns:a="http://schemas.openxmlformats.org/drawingml/2006/main" prst="rect">
             <a:avLst/>
@@ -1758,47 +2046,74 @@
                 <a:spcPct val="110000"/>
               </a:lnSpc>
               <a:buNone/>
-              <a:defRPr sz="1200" b="1">
-                <a:solidFill>
-                  <a:srgbClr val="244D3C"/>
-                </a:solidFill>
-                <a:latin typeface="Helvetica Neue"/>
-                <a:ea typeface="Helvetica Neue"/>
-                <a:cs typeface="Helvetica Neue"/>
-              </a:defRPr>
-            </a:pPr>
-            <a:r>
-              <a:rPr sz="1200" b="1">
-                <a:solidFill>
-                  <a:srgbClr val="244D3C"/>
-                </a:solidFill>
-                <a:latin typeface="Helvetica Neue"/>
-                <a:ea typeface="Helvetica Neue"/>
-                <a:cs typeface="Helvetica Neue"/>
-              </a:rPr>
-              <a:t>KYLE HOBSON   /   LEARNING &amp; FACILITATION</a:t>
-            </a:r>
-          </a:p>
-        </p:txBody>
-      </p:sp>
-      <p:sp>
-        <p:nvSpPr>
-          <p:cNvPr id="3" name="headline">
-            <a:extLst xmlns:a="http://schemas.openxmlformats.org/drawingml/2006/main">
-              <a:ext uri="{FF2B5EF4-FFF2-40B4-BE49-F238E27FC236}">
-                <a16:creationId xmlns:a16="http://schemas.microsoft.com/office/drawing/2014/main" id="{16E13230-ABD0-4945-8ADF-F2D38A223CC6}"/>
-              </a:ext>
-            </a:extLst>
-          </p:cNvPr>
-          <p:cNvSpPr>
-            <a:spLocks xmlns:a="http://schemas.openxmlformats.org/drawingml/2006/main" noGrp="1"/>
-          </p:cNvSpPr>
-          <p:nvPr/>
-        </p:nvSpPr>
-        <p:spPr>
-          <a:xfrm xmlns:a="http://schemas.openxmlformats.org/drawingml/2006/main">
-            <a:off x="609600" y="1543050"/>
-            <a:ext cx="10620375" cy="1905000"/>
+              <a:defRPr sz="1425" b="0">
+                <a:solidFill>
+                  <a:srgbClr val="58645D"/>
+                </a:solidFill>
+                <a:latin typeface="Helvetica Neue"/>
+                <a:ea typeface="Helvetica Neue"/>
+                <a:cs typeface="Helvetica Neue"/>
+              </a:defRPr>
+            </a:pPr>
+            <a:r>
+              <a:rPr sz="1425" b="0">
+                <a:solidFill>
+                  <a:srgbClr val="58645D"/>
+                </a:solidFill>
+                <a:latin typeface="Helvetica Neue"/>
+                <a:ea typeface="Helvetica Neue"/>
+                <a:cs typeface="Helvetica Neue"/>
+              </a:rPr>
+              <a:t>Team workshop artifact · KeepMake, 2025</a:t>
+            </a:r>
+          </a:p>
+          <a:p xmlns:a="http://schemas.openxmlformats.org/drawingml/2006/main">
+            <a:pPr>
+              <a:lnSpc>
+                <a:spcPct val="110000"/>
+              </a:lnSpc>
+              <a:buNone/>
+              <a:defRPr sz="1425" b="0">
+                <a:solidFill>
+                  <a:srgbClr val="58645D"/>
+                </a:solidFill>
+                <a:latin typeface="Helvetica Neue"/>
+                <a:ea typeface="Helvetica Neue"/>
+                <a:cs typeface="Helvetica Neue"/>
+              </a:defRPr>
+            </a:pPr>
+            <a:r>
+              <a:rPr sz="1425" b="0">
+                <a:solidFill>
+                  <a:srgbClr val="58645D"/>
+                </a:solidFill>
+                <a:latin typeface="Helvetica Neue"/>
+                <a:ea typeface="Helvetica Neue"/>
+                <a:cs typeface="Helvetica Neue"/>
+              </a:rPr>
+              <a:t>Worksheet: Board of Innovation</a:t>
+            </a:r>
+          </a:p>
+        </p:txBody>
+      </p:sp>
+      <p:sp>
+        <p:nvSpPr>
+          <p:cNvPr id="6" name="proof">
+            <a:extLst xmlns:a="http://schemas.openxmlformats.org/drawingml/2006/main">
+              <a:ext uri="{FF2B5EF4-FFF2-40B4-BE49-F238E27FC236}">
+                <a16:creationId xmlns:a16="http://schemas.microsoft.com/office/drawing/2014/main" id="{3BBA0295-FB8B-42BF-A00F-BDA108A00521}"/>
+              </a:ext>
+            </a:extLst>
+          </p:cNvPr>
+          <p:cNvSpPr>
+            <a:spLocks xmlns:a="http://schemas.openxmlformats.org/drawingml/2006/main" noGrp="1"/>
+          </p:cNvSpPr>
+          <p:nvPr/>
+        </p:nvSpPr>
+        <p:spPr>
+          <a:xfrm xmlns:a="http://schemas.openxmlformats.org/drawingml/2006/main">
+            <a:off x="647700" y="5972175"/>
+            <a:ext cx="5572125" cy="533400"/>
           </a:xfrm>
           <a:prstGeom xmlns:a="http://schemas.openxmlformats.org/drawingml/2006/main" prst="rect">
             <a:avLst/>
@@ -1819,74 +2134,74 @@
                 <a:spcPct val="110000"/>
               </a:lnSpc>
               <a:buNone/>
-              <a:defRPr sz="4500" b="1">
-                <a:solidFill>
-                  <a:srgbClr val="192B25"/>
-                </a:solidFill>
-                <a:latin typeface="Helvetica Neue"/>
-                <a:ea typeface="Helvetica Neue"/>
-                <a:cs typeface="Helvetica Neue"/>
-              </a:defRPr>
-            </a:pPr>
-            <a:r>
-              <a:rPr sz="4500" b="1">
-                <a:solidFill>
-                  <a:srgbClr val="192B25"/>
-                </a:solidFill>
-                <a:latin typeface="Helvetica Neue"/>
-                <a:ea typeface="Helvetica Neue"/>
-                <a:cs typeface="Helvetica Neue"/>
-              </a:rPr>
-              <a:t>Make the next step</a:t>
-            </a:r>
-          </a:p>
-          <a:p xmlns:a="http://schemas.openxmlformats.org/drawingml/2006/main">
-            <a:pPr>
-              <a:lnSpc>
-                <a:spcPct val="110000"/>
-              </a:lnSpc>
-              <a:buNone/>
-              <a:defRPr sz="4500" b="1">
-                <a:solidFill>
-                  <a:srgbClr val="192B25"/>
-                </a:solidFill>
-                <a:latin typeface="Helvetica Neue"/>
-                <a:ea typeface="Helvetica Neue"/>
-                <a:cs typeface="Helvetica Neue"/>
-              </a:defRPr>
-            </a:pPr>
-            <a:r>
-              <a:rPr sz="4500" b="1">
-                <a:solidFill>
-                  <a:srgbClr val="192B25"/>
-                </a:solidFill>
-                <a:latin typeface="Helvetica Neue"/>
-                <a:ea typeface="Helvetica Neue"/>
-                <a:cs typeface="Helvetica Neue"/>
-              </a:rPr>
-              <a:t>something people can do</a:t>
-            </a:r>
-          </a:p>
-        </p:txBody>
-      </p:sp>
-      <p:sp>
-        <p:nvSpPr>
-          <p:cNvPr id="4" name="intro">
-            <a:extLst xmlns:a="http://schemas.openxmlformats.org/drawingml/2006/main">
-              <a:ext uri="{FF2B5EF4-FFF2-40B4-BE49-F238E27FC236}">
-                <a16:creationId xmlns:a16="http://schemas.microsoft.com/office/drawing/2014/main" id="{75DCF1BD-83AB-48C6-BA63-BFB8AC79F387}"/>
-              </a:ext>
-            </a:extLst>
-          </p:cNvPr>
-          <p:cNvSpPr>
-            <a:spLocks xmlns:a="http://schemas.openxmlformats.org/drawingml/2006/main" noGrp="1"/>
-          </p:cNvSpPr>
-          <p:nvPr/>
-        </p:nvSpPr>
-        <p:spPr>
-          <a:xfrm xmlns:a="http://schemas.openxmlformats.org/drawingml/2006/main">
-            <a:off x="647700" y="4152900"/>
-            <a:ext cx="10287000" cy="952500"/>
+              <a:defRPr sz="1425" b="0">
+                <a:solidFill>
+                  <a:srgbClr val="244D3C"/>
+                </a:solidFill>
+                <a:latin typeface="Helvetica Neue"/>
+                <a:ea typeface="Helvetica Neue"/>
+                <a:cs typeface="Helvetica Neue"/>
+              </a:defRPr>
+            </a:pPr>
+            <a:r>
+              <a:rPr sz="1425" b="0">
+                <a:solidFill>
+                  <a:srgbClr val="244D3C"/>
+                </a:solidFill>
+                <a:latin typeface="Helvetica Neue"/>
+                <a:ea typeface="Helvetica Neue"/>
+                <a:cs typeface="Helvetica Neue"/>
+              </a:rPr>
+              <a:t>Coursera instructor</a:t>
+            </a:r>
+          </a:p>
+          <a:p xmlns:a="http://schemas.openxmlformats.org/drawingml/2006/main">
+            <a:pPr>
+              <a:lnSpc>
+                <a:spcPct val="110000"/>
+              </a:lnSpc>
+              <a:buNone/>
+              <a:defRPr sz="1425" b="0">
+                <a:solidFill>
+                  <a:srgbClr val="244D3C"/>
+                </a:solidFill>
+                <a:latin typeface="Helvetica Neue"/>
+                <a:ea typeface="Helvetica Neue"/>
+                <a:cs typeface="Helvetica Neue"/>
+              </a:defRPr>
+            </a:pPr>
+            <a:r>
+              <a:rPr sz="1425" b="0">
+                <a:solidFill>
+                  <a:srgbClr val="244D3C"/>
+                </a:solidFill>
+                <a:latin typeface="Helvetica Neue"/>
+                <a:ea typeface="Helvetica Neue"/>
+                <a:cs typeface="Helvetica Neue"/>
+              </a:rPr>
+              <a:t>ASU learning design · KeepMake workshops</a:t>
+            </a:r>
+          </a:p>
+        </p:txBody>
+      </p:sp>
+      <p:sp>
+        <p:nvSpPr>
+          <p:cNvPr id="7" name="slide-number">
+            <a:extLst xmlns:a="http://schemas.openxmlformats.org/drawingml/2006/main">
+              <a:ext uri="{FF2B5EF4-FFF2-40B4-BE49-F238E27FC236}">
+                <a16:creationId xmlns:a16="http://schemas.microsoft.com/office/drawing/2014/main" id="{008298BC-2B8D-45BF-81E6-3DAB1CA26BF4}"/>
+              </a:ext>
+            </a:extLst>
+          </p:cNvPr>
+          <p:cNvSpPr>
+            <a:spLocks xmlns:a="http://schemas.openxmlformats.org/drawingml/2006/main" noGrp="1"/>
+          </p:cNvSpPr>
+          <p:nvPr/>
+        </p:nvSpPr>
+        <p:spPr>
+          <a:xfrm xmlns:a="http://schemas.openxmlformats.org/drawingml/2006/main">
+            <a:off x="11353800" y="6562725"/>
+            <a:ext cx="323850" cy="190500"/>
           </a:xfrm>
           <a:prstGeom xmlns:a="http://schemas.openxmlformats.org/drawingml/2006/main" prst="rect">
             <a:avLst/>
@@ -1907,155 +2222,6 @@
                 <a:spcPct val="110000"/>
               </a:lnSpc>
               <a:buNone/>
-              <a:defRPr sz="2025" b="0">
-                <a:solidFill>
-                  <a:srgbClr val="192B25"/>
-                </a:solidFill>
-                <a:latin typeface="Helvetica Neue"/>
-                <a:ea typeface="Helvetica Neue"/>
-                <a:cs typeface="Helvetica Neue"/>
-              </a:defRPr>
-            </a:pPr>
-            <a:r>
-              <a:rPr sz="2025" b="0">
-                <a:solidFill>
-                  <a:srgbClr val="192B25"/>
-                </a:solidFill>
-                <a:latin typeface="Helvetica Neue"/>
-                <a:ea typeface="Helvetica Neue"/>
-                <a:cs typeface="Helvetica Neue"/>
-              </a:rPr>
-              <a:t>Instructional design, hands-on AI teaching,</a:t>
-            </a:r>
-          </a:p>
-          <a:p xmlns:a="http://schemas.openxmlformats.org/drawingml/2006/main">
-            <a:pPr>
-              <a:lnSpc>
-                <a:spcPct val="110000"/>
-              </a:lnSpc>
-              <a:buNone/>
-              <a:defRPr sz="2025" b="0">
-                <a:solidFill>
-                  <a:srgbClr val="192B25"/>
-                </a:solidFill>
-                <a:latin typeface="Helvetica Neue"/>
-                <a:ea typeface="Helvetica Neue"/>
-                <a:cs typeface="Helvetica Neue"/>
-              </a:defRPr>
-            </a:pPr>
-            <a:r>
-              <a:rPr sz="2025" b="0">
-                <a:solidFill>
-                  <a:srgbClr val="192B25"/>
-                </a:solidFill>
-                <a:latin typeface="Helvetica Neue"/>
-                <a:ea typeface="Helvetica Neue"/>
-                <a:cs typeface="Helvetica Neue"/>
-              </a:rPr>
-              <a:t>and workshops that leave a team something to build on.</a:t>
-            </a:r>
-          </a:p>
-        </p:txBody>
-      </p:sp>
-      <p:sp>
-        <p:nvSpPr>
-          <p:cNvPr id="5" name="proof">
-            <a:extLst xmlns:a="http://schemas.openxmlformats.org/drawingml/2006/main">
-              <a:ext uri="{FF2B5EF4-FFF2-40B4-BE49-F238E27FC236}">
-                <a16:creationId xmlns:a16="http://schemas.microsoft.com/office/drawing/2014/main" id="{2BF9D13B-FCC5-466C-9448-F2CCC3DD66B0}"/>
-              </a:ext>
-            </a:extLst>
-          </p:cNvPr>
-          <p:cNvSpPr>
-            <a:spLocks xmlns:a="http://schemas.openxmlformats.org/drawingml/2006/main" noGrp="1"/>
-          </p:cNvSpPr>
-          <p:nvPr/>
-        </p:nvSpPr>
-        <p:spPr>
-          <a:xfrm xmlns:a="http://schemas.openxmlformats.org/drawingml/2006/main">
-            <a:off x="647700" y="6029325"/>
-            <a:ext cx="10382250" cy="295275"/>
-          </a:xfrm>
-          <a:prstGeom xmlns:a="http://schemas.openxmlformats.org/drawingml/2006/main" prst="rect">
-            <a:avLst/>
-          </a:prstGeom>
-          <a:noFill xmlns:a="http://schemas.openxmlformats.org/drawingml/2006/main"/>
-          <a:ln xmlns:a="http://schemas.openxmlformats.org/drawingml/2006/main" w="0">
-            <a:noFill/>
-          </a:ln>
-        </p:spPr>
-        <p:txBody>
-          <a:bodyPr xmlns:a="http://schemas.openxmlformats.org/drawingml/2006/main" wrap="square" lIns="0" tIns="0" rIns="0" bIns="0" anchor="t">
-            <a:noAutofit/>
-          </a:bodyPr>
-          <a:lstStyle xmlns:a="http://schemas.openxmlformats.org/drawingml/2006/main"/>
-          <a:p xmlns:a="http://schemas.openxmlformats.org/drawingml/2006/main">
-            <a:pPr>
-              <a:lnSpc>
-                <a:spcPct val="110000"/>
-              </a:lnSpc>
-              <a:buNone/>
-              <a:defRPr sz="1575" b="0">
-                <a:solidFill>
-                  <a:srgbClr val="58645D"/>
-                </a:solidFill>
-                <a:latin typeface="Helvetica Neue"/>
-                <a:ea typeface="Helvetica Neue"/>
-                <a:cs typeface="Helvetica Neue"/>
-              </a:defRPr>
-            </a:pPr>
-            <a:r>
-              <a:rPr sz="1575" b="0">
-                <a:solidFill>
-                  <a:srgbClr val="58645D"/>
-                </a:solidFill>
-                <a:latin typeface="Helvetica Neue"/>
-                <a:ea typeface="Helvetica Neue"/>
-                <a:cs typeface="Helvetica Neue"/>
-              </a:rPr>
-              <a:t>Coursera instructor · ASU learning design · KeepMake workshops</a:t>
-            </a:r>
-          </a:p>
-        </p:txBody>
-      </p:sp>
-      <p:sp>
-        <p:nvSpPr>
-          <p:cNvPr id="6" name="slide-number">
-            <a:extLst xmlns:a="http://schemas.openxmlformats.org/drawingml/2006/main">
-              <a:ext uri="{FF2B5EF4-FFF2-40B4-BE49-F238E27FC236}">
-                <a16:creationId xmlns:a16="http://schemas.microsoft.com/office/drawing/2014/main" id="{4A7F9494-F12D-44BC-A3C9-72592E5C7B77}"/>
-              </a:ext>
-            </a:extLst>
-          </p:cNvPr>
-          <p:cNvSpPr>
-            <a:spLocks xmlns:a="http://schemas.openxmlformats.org/drawingml/2006/main" noGrp="1"/>
-          </p:cNvSpPr>
-          <p:nvPr/>
-        </p:nvSpPr>
-        <p:spPr>
-          <a:xfrm xmlns:a="http://schemas.openxmlformats.org/drawingml/2006/main">
-            <a:off x="11353800" y="6562725"/>
-            <a:ext cx="323850" cy="190500"/>
-          </a:xfrm>
-          <a:prstGeom xmlns:a="http://schemas.openxmlformats.org/drawingml/2006/main" prst="rect">
-            <a:avLst/>
-          </a:prstGeom>
-          <a:noFill xmlns:a="http://schemas.openxmlformats.org/drawingml/2006/main"/>
-          <a:ln xmlns:a="http://schemas.openxmlformats.org/drawingml/2006/main" w="0">
-            <a:noFill/>
-          </a:ln>
-        </p:spPr>
-        <p:txBody>
-          <a:bodyPr xmlns:a="http://schemas.openxmlformats.org/drawingml/2006/main" wrap="square" lIns="0" tIns="0" rIns="0" bIns="0" anchor="t">
-            <a:noAutofit/>
-          </a:bodyPr>
-          <a:lstStyle xmlns:a="http://schemas.openxmlformats.org/drawingml/2006/main"/>
-          <a:p xmlns:a="http://schemas.openxmlformats.org/drawingml/2006/main">
-            <a:pPr>
-              <a:lnSpc>
-                <a:spcPct val="110000"/>
-              </a:lnSpc>
-              <a:buNone/>
               <a:defRPr sz="1050" b="0">
                 <a:solidFill>
                   <a:srgbClr val="58645D"/>
@@ -2082,7 +2248,7 @@
     </p:spTree>
     <p:extLst>
       <p:ext uri="{BB962C8B-B14F-4D97-AF65-F5344CB8AC3E}">
-        <p14:creationId xmlns:p14="http://schemas.microsoft.com/office/powerpoint/2010/main" val="1292085439"/>
+        <p14:creationId xmlns:p14="http://schemas.microsoft.com/office/powerpoint/2010/main" val="1569874333"/>
       </p:ext>
     </p:extLst>
   </p:cSld>
@@ -2113,7 +2279,7 @@
           <p:cNvPr id="7" name="section-label">
             <a:extLst xmlns:a="http://schemas.openxmlformats.org/drawingml/2006/main">
               <a:ext uri="{FF2B5EF4-FFF2-40B4-BE49-F238E27FC236}">
-                <a16:creationId xmlns:a16="http://schemas.microsoft.com/office/drawing/2014/main" id="{F56ED3DC-2C28-42AE-9A75-B9F117B360F0}"/>
+                <a16:creationId xmlns:a16="http://schemas.microsoft.com/office/drawing/2014/main" id="{88976E8B-B54B-4C2A-B524-6D919E906AE0}"/>
               </a:ext>
             </a:extLst>
           </p:cNvPr>
@@ -2174,7 +2340,7 @@
           <p:cNvPr id="2" name="headline">
             <a:extLst xmlns:a="http://schemas.openxmlformats.org/drawingml/2006/main">
               <a:ext uri="{FF2B5EF4-FFF2-40B4-BE49-F238E27FC236}">
-                <a16:creationId xmlns:a16="http://schemas.microsoft.com/office/drawing/2014/main" id="{4B0534A4-E90F-4492-ACD6-42CFF3819992}"/>
+                <a16:creationId xmlns:a16="http://schemas.microsoft.com/office/drawing/2014/main" id="{D1056C43-72BD-44DA-89F4-1254017AA9D7}"/>
               </a:ext>
             </a:extLst>
           </p:cNvPr>
@@ -2262,7 +2428,7 @@
           <p:cNvPr id="3" name="contact-intent">
             <a:extLst xmlns:a="http://schemas.openxmlformats.org/drawingml/2006/main">
               <a:ext uri="{FF2B5EF4-FFF2-40B4-BE49-F238E27FC236}">
-                <a16:creationId xmlns:a16="http://schemas.microsoft.com/office/drawing/2014/main" id="{C940EEEE-3AEB-4DF5-8F1C-4FDDBB13C59C}"/>
+                <a16:creationId xmlns:a16="http://schemas.microsoft.com/office/drawing/2014/main" id="{3B29A0B8-DCCB-462B-9186-D095CDB1E678}"/>
               </a:ext>
             </a:extLst>
           </p:cNvPr>
@@ -2350,7 +2516,7 @@
           <p:cNvPr id="4" name="email">
             <a:extLst xmlns:a="http://schemas.openxmlformats.org/drawingml/2006/main">
               <a:ext uri="{FF2B5EF4-FFF2-40B4-BE49-F238E27FC236}">
-                <a16:creationId xmlns:a16="http://schemas.microsoft.com/office/drawing/2014/main" id="{D4D57D62-01E1-4715-A695-6E56C3C8D53A}"/>
+                <a16:creationId xmlns:a16="http://schemas.microsoft.com/office/drawing/2014/main" id="{F8E10FB9-FE38-49C8-A358-3B9FFC4CAC96}"/>
               </a:ext>
             </a:extLst>
           </p:cNvPr>
@@ -2400,7 +2566,7 @@
                 <a:latin typeface="Helvetica Neue"/>
                 <a:ea typeface="Helvetica Neue"/>
                 <a:cs typeface="Helvetica Neue"/>
-                <a:hlinkClick xmlns:r="http://schemas.openxmlformats.org/officeDocument/2006/relationships" r:id="Rcddaf6a481fb48bb"/>
+                <a:hlinkClick xmlns:r="http://schemas.openxmlformats.org/officeDocument/2006/relationships" r:id="Rfba4238d50e641cc"/>
               </a:rPr>
               <a:t>JonathanKyleHobson@gmail.com</a:t>
             </a:r>
@@ -2412,7 +2578,7 @@
           <p:cNvPr id="5" name="portfolio">
             <a:extLst xmlns:a="http://schemas.openxmlformats.org/drawingml/2006/main">
               <a:ext uri="{FF2B5EF4-FFF2-40B4-BE49-F238E27FC236}">
-                <a16:creationId xmlns:a16="http://schemas.microsoft.com/office/drawing/2014/main" id="{03B6A886-A856-420A-A6BF-5C79C32174AC}"/>
+                <a16:creationId xmlns:a16="http://schemas.microsoft.com/office/drawing/2014/main" id="{384AB903-4E5A-4FE4-A25C-7D94C6F7B0AC}"/>
               </a:ext>
             </a:extLst>
           </p:cNvPr>
@@ -2462,7 +2628,7 @@
                 <a:latin typeface="Helvetica Neue"/>
                 <a:ea typeface="Helvetica Neue"/>
                 <a:cs typeface="Helvetica Neue"/>
-                <a:hlinkClick xmlns:r="http://schemas.openxmlformats.org/officeDocument/2006/relationships" r:id="R1eb1b7c7c6e44e86"/>
+                <a:hlinkClick xmlns:r="http://schemas.openxmlformats.org/officeDocument/2006/relationships" r:id="R97b0cdda115b4559"/>
               </a:rPr>
               <a:t>jonathankhobson.github.io/portfolio/learning</a:t>
             </a:r>
@@ -2474,7 +2640,7 @@
           <p:cNvPr id="6" name="slide-number">
             <a:extLst xmlns:a="http://schemas.openxmlformats.org/drawingml/2006/main">
               <a:ext uri="{FF2B5EF4-FFF2-40B4-BE49-F238E27FC236}">
-                <a16:creationId xmlns:a16="http://schemas.microsoft.com/office/drawing/2014/main" id="{DE4BA596-C52E-4DE5-ADD5-23B615F7FEF7}"/>
+                <a16:creationId xmlns:a16="http://schemas.microsoft.com/office/drawing/2014/main" id="{43919B5E-6122-4F65-BC48-E73984DA3E8B}"/>
               </a:ext>
             </a:extLst>
           </p:cNvPr>
@@ -2533,7 +2699,7 @@
     </p:spTree>
     <p:extLst>
       <p:ext uri="{BB962C8B-B14F-4D97-AF65-F5344CB8AC3E}">
-        <p14:creationId xmlns:p14="http://schemas.microsoft.com/office/powerpoint/2010/main" val="97312006"/>
+        <p14:creationId xmlns:p14="http://schemas.microsoft.com/office/powerpoint/2010/main" val="771268161"/>
       </p:ext>
     </p:extLst>
   </p:cSld>
@@ -2564,7 +2730,7 @@
           <p:cNvPr id="8" name="section-label">
             <a:extLst xmlns:a="http://schemas.openxmlformats.org/drawingml/2006/main">
               <a:ext uri="{FF2B5EF4-FFF2-40B4-BE49-F238E27FC236}">
-                <a16:creationId xmlns:a16="http://schemas.microsoft.com/office/drawing/2014/main" id="{9EFD302B-38B0-426D-B731-1531A80D09D6}"/>
+                <a16:creationId xmlns:a16="http://schemas.microsoft.com/office/drawing/2014/main" id="{D6630432-522E-4378-A707-E826101E054E}"/>
               </a:ext>
             </a:extLst>
           </p:cNvPr>
@@ -2625,7 +2791,7 @@
           <p:cNvPr id="2" name="headline">
             <a:extLst xmlns:a="http://schemas.openxmlformats.org/drawingml/2006/main">
               <a:ext uri="{FF2B5EF4-FFF2-40B4-BE49-F238E27FC236}">
-                <a16:creationId xmlns:a16="http://schemas.microsoft.com/office/drawing/2014/main" id="{A16F28A9-DF2D-4408-B8FF-9EEB109263C7}"/>
+                <a16:creationId xmlns:a16="http://schemas.microsoft.com/office/drawing/2014/main" id="{342DEF81-30BF-4CC1-84E1-D40969FF2FEE}"/>
               </a:ext>
             </a:extLst>
           </p:cNvPr>
@@ -2713,7 +2879,7 @@
           <p:cNvPr id="3" name="task">
             <a:extLst xmlns:a="http://schemas.openxmlformats.org/drawingml/2006/main">
               <a:ext uri="{FF2B5EF4-FFF2-40B4-BE49-F238E27FC236}">
-                <a16:creationId xmlns:a16="http://schemas.microsoft.com/office/drawing/2014/main" id="{A1F08EFD-6388-4709-8741-10222466E83D}"/>
+                <a16:creationId xmlns:a16="http://schemas.microsoft.com/office/drawing/2014/main" id="{6AF37373-EEC9-4590-9CF6-D81E85F48581}"/>
               </a:ext>
             </a:extLst>
           </p:cNvPr>
@@ -2774,7 +2940,7 @@
           <p:cNvPr id="4" name="role">
             <a:extLst xmlns:a="http://schemas.openxmlformats.org/drawingml/2006/main">
               <a:ext uri="{FF2B5EF4-FFF2-40B4-BE49-F238E27FC236}">
-                <a16:creationId xmlns:a16="http://schemas.microsoft.com/office/drawing/2014/main" id="{7F9A26DD-5F21-4F5F-8A96-AC4F794ED19A}"/>
+                <a16:creationId xmlns:a16="http://schemas.microsoft.com/office/drawing/2014/main" id="{955C3C6B-ECD5-47E0-B561-EC8BC2991EE8}"/>
               </a:ext>
             </a:extLst>
           </p:cNvPr>
@@ -2839,7 +3005,7 @@
           <p:nvPr/>
         </p:nvPicPr>
         <p:blipFill>
-          <a:blip xmlns:r="http://schemas.openxmlformats.org/officeDocument/2006/relationships" xmlns:a="http://schemas.openxmlformats.org/drawingml/2006/main" r:embed="Rbc7df397e8634a8e"/>
+          <a:blip xmlns:r="http://schemas.openxmlformats.org/officeDocument/2006/relationships" xmlns:a="http://schemas.openxmlformats.org/drawingml/2006/main" r:embed="R95c29e40c4954c1c"/>
           <a:stretch xmlns:a="http://schemas.openxmlformats.org/drawingml/2006/main"/>
         </p:blipFill>
         <p:spPr>
@@ -2857,7 +3023,7 @@
           <p:cNvPr id="6" name="caption">
             <a:extLst xmlns:a="http://schemas.openxmlformats.org/drawingml/2006/main">
               <a:ext uri="{FF2B5EF4-FFF2-40B4-BE49-F238E27FC236}">
-                <a16:creationId xmlns:a16="http://schemas.microsoft.com/office/drawing/2014/main" id="{006565B7-C605-409C-B5D2-E99781CE2437}"/>
+                <a16:creationId xmlns:a16="http://schemas.microsoft.com/office/drawing/2014/main" id="{65F5F8CD-556F-49C5-A626-06A2D8AC6930}"/>
               </a:ext>
             </a:extLst>
           </p:cNvPr>
@@ -2918,7 +3084,7 @@
           <p:cNvPr id="7" name="slide-number">
             <a:extLst xmlns:a="http://schemas.openxmlformats.org/drawingml/2006/main">
               <a:ext uri="{FF2B5EF4-FFF2-40B4-BE49-F238E27FC236}">
-                <a16:creationId xmlns:a16="http://schemas.microsoft.com/office/drawing/2014/main" id="{23521ED6-C8F0-487E-8483-B11F2B76051B}"/>
+                <a16:creationId xmlns:a16="http://schemas.microsoft.com/office/drawing/2014/main" id="{03CF98DD-22EE-4FC5-BB41-91BF1358BA23}"/>
               </a:ext>
             </a:extLst>
           </p:cNvPr>
@@ -2977,7 +3143,7 @@
     </p:spTree>
     <p:extLst>
       <p:ext uri="{BB962C8B-B14F-4D97-AF65-F5344CB8AC3E}">
-        <p14:creationId xmlns:p14="http://schemas.microsoft.com/office/powerpoint/2010/main" val="1120935863"/>
+        <p14:creationId xmlns:p14="http://schemas.microsoft.com/office/powerpoint/2010/main" val="780435344"/>
       </p:ext>
     </p:extLst>
   </p:cSld>
@@ -3008,7 +3174,7 @@
           <p:cNvPr id="10" name="section-label">
             <a:extLst xmlns:a="http://schemas.openxmlformats.org/drawingml/2006/main">
               <a:ext uri="{FF2B5EF4-FFF2-40B4-BE49-F238E27FC236}">
-                <a16:creationId xmlns:a16="http://schemas.microsoft.com/office/drawing/2014/main" id="{EF7652CC-8650-444F-9737-F74F35AC0C9C}"/>
+                <a16:creationId xmlns:a16="http://schemas.microsoft.com/office/drawing/2014/main" id="{93DF3BFE-8D27-4C0D-8F3D-240D1B14F589}"/>
               </a:ext>
             </a:extLst>
           </p:cNvPr>
@@ -3069,7 +3235,7 @@
           <p:cNvPr id="2" name="headline">
             <a:extLst xmlns:a="http://schemas.openxmlformats.org/drawingml/2006/main">
               <a:ext uri="{FF2B5EF4-FFF2-40B4-BE49-F238E27FC236}">
-                <a16:creationId xmlns:a16="http://schemas.microsoft.com/office/drawing/2014/main" id="{431C7278-E386-43BD-A4A8-3AD953E01F5F}"/>
+                <a16:creationId xmlns:a16="http://schemas.microsoft.com/office/drawing/2014/main" id="{1EC1E6D3-D3BA-447F-A527-9D1EF0FDCBA5}"/>
               </a:ext>
             </a:extLst>
           </p:cNvPr>
@@ -3130,7 +3296,7 @@
           <p:cNvPr id="3" name="before">
             <a:extLst xmlns:a="http://schemas.openxmlformats.org/drawingml/2006/main">
               <a:ext uri="{FF2B5EF4-FFF2-40B4-BE49-F238E27FC236}">
-                <a16:creationId xmlns:a16="http://schemas.microsoft.com/office/drawing/2014/main" id="{5A9100AF-5C9A-4310-91B8-BB10C5688154}"/>
+                <a16:creationId xmlns:a16="http://schemas.microsoft.com/office/drawing/2014/main" id="{CDE70972-7921-4CBD-8015-5607377D5618}"/>
               </a:ext>
             </a:extLst>
           </p:cNvPr>
@@ -3195,7 +3361,7 @@
           <p:nvPr/>
         </p:nvPicPr>
         <p:blipFill>
-          <a:blip xmlns:r="http://schemas.openxmlformats.org/officeDocument/2006/relationships" xmlns:a="http://schemas.openxmlformats.org/drawingml/2006/main" r:embed="R60987f142ba74fe5"/>
+          <a:blip xmlns:r="http://schemas.openxmlformats.org/officeDocument/2006/relationships" xmlns:a="http://schemas.openxmlformats.org/drawingml/2006/main" r:embed="Rf6713039b67f4a88"/>
           <a:stretch xmlns:a="http://schemas.openxmlformats.org/drawingml/2006/main"/>
         </p:blipFill>
         <p:spPr>
@@ -3213,7 +3379,7 @@
           <p:cNvPr id="5" name="after">
             <a:extLst xmlns:a="http://schemas.openxmlformats.org/drawingml/2006/main">
               <a:ext uri="{FF2B5EF4-FFF2-40B4-BE49-F238E27FC236}">
-                <a16:creationId xmlns:a16="http://schemas.microsoft.com/office/drawing/2014/main" id="{452B8FA6-03B4-4C8B-8AA3-E6EDCB47DAE5}"/>
+                <a16:creationId xmlns:a16="http://schemas.microsoft.com/office/drawing/2014/main" id="{2FE1DF7A-EBFD-4B25-A044-06C0DC048E7A}"/>
               </a:ext>
             </a:extLst>
           </p:cNvPr>
@@ -3278,7 +3444,7 @@
           <p:nvPr/>
         </p:nvPicPr>
         <p:blipFill>
-          <a:blip xmlns:r="http://schemas.openxmlformats.org/officeDocument/2006/relationships" xmlns:a="http://schemas.openxmlformats.org/drawingml/2006/main" r:embed="R3792365da973436f"/>
+          <a:blip xmlns:r="http://schemas.openxmlformats.org/officeDocument/2006/relationships" xmlns:a="http://schemas.openxmlformats.org/drawingml/2006/main" r:embed="R854d35097ac9449b"/>
           <a:stretch xmlns:a="http://schemas.openxmlformats.org/drawingml/2006/main"/>
         </p:blipFill>
         <p:spPr>
@@ -3296,7 +3462,7 @@
           <p:cNvPr id="7" name="clip-band">
             <a:extLst xmlns:a="http://schemas.openxmlformats.org/drawingml/2006/main">
               <a:ext uri="{FF2B5EF4-FFF2-40B4-BE49-F238E27FC236}">
-                <a16:creationId xmlns:a16="http://schemas.microsoft.com/office/drawing/2014/main" id="{4142D249-F048-4A40-8EB6-35CBFC0B022F}"/>
+                <a16:creationId xmlns:a16="http://schemas.microsoft.com/office/drawing/2014/main" id="{51AD504E-B1CF-4577-A548-AA687E7CBD5F}"/>
               </a:ext>
             </a:extLst>
           </p:cNvPr>
@@ -3326,7 +3492,7 @@
           <p:cNvPr id="8" name="clip">
             <a:extLst xmlns:a="http://schemas.openxmlformats.org/drawingml/2006/main">
               <a:ext uri="{FF2B5EF4-FFF2-40B4-BE49-F238E27FC236}">
-                <a16:creationId xmlns:a16="http://schemas.microsoft.com/office/drawing/2014/main" id="{E7AA3087-C3C1-41D1-8F6E-7F270C02AA8A}"/>
+                <a16:creationId xmlns:a16="http://schemas.microsoft.com/office/drawing/2014/main" id="{F286A06D-003E-4780-9EE7-6432D27BB155}"/>
               </a:ext>
             </a:extLst>
           </p:cNvPr>
@@ -3376,7 +3542,7 @@
                 <a:latin typeface="Helvetica Neue"/>
                 <a:ea typeface="Helvetica Neue"/>
                 <a:cs typeface="Helvetica Neue"/>
-                <a:hlinkClick xmlns:r="http://schemas.openxmlformats.org/officeDocument/2006/relationships" r:id="R3ae1362d18b8439b"/>
+                <a:hlinkClick xmlns:r="http://schemas.openxmlformats.org/officeDocument/2006/relationships" r:id="Rf1b19b57266b4c69"/>
               </a:rPr>
               <a:t>Watch the 1:24 teaching excerpt</a:t>
             </a:r>
@@ -3388,7 +3554,7 @@
           <p:cNvPr id="9" name="slide-number">
             <a:extLst xmlns:a="http://schemas.openxmlformats.org/drawingml/2006/main">
               <a:ext uri="{FF2B5EF4-FFF2-40B4-BE49-F238E27FC236}">
-                <a16:creationId xmlns:a16="http://schemas.microsoft.com/office/drawing/2014/main" id="{219FEAAE-0793-406E-A76B-5E9FED09C67A}"/>
+                <a16:creationId xmlns:a16="http://schemas.microsoft.com/office/drawing/2014/main" id="{97DC63FE-379D-481B-B936-F099BE99A955}"/>
               </a:ext>
             </a:extLst>
           </p:cNvPr>
@@ -3447,7 +3613,7 @@
     </p:spTree>
     <p:extLst>
       <p:ext uri="{BB962C8B-B14F-4D97-AF65-F5344CB8AC3E}">
-        <p14:creationId xmlns:p14="http://schemas.microsoft.com/office/powerpoint/2010/main" val="2084369638"/>
+        <p14:creationId xmlns:p14="http://schemas.microsoft.com/office/powerpoint/2010/main" val="1105762661"/>
       </p:ext>
     </p:extLst>
   </p:cSld>
@@ -3478,7 +3644,7 @@
           <p:cNvPr id="16" name="section-label">
             <a:extLst xmlns:a="http://schemas.openxmlformats.org/drawingml/2006/main">
               <a:ext uri="{FF2B5EF4-FFF2-40B4-BE49-F238E27FC236}">
-                <a16:creationId xmlns:a16="http://schemas.microsoft.com/office/drawing/2014/main" id="{4F765EDC-42DA-4EE5-B8A8-951A0F34FCDF}"/>
+                <a16:creationId xmlns:a16="http://schemas.microsoft.com/office/drawing/2014/main" id="{7BFD53BA-F11C-48B8-830F-405B6CC9E570}"/>
               </a:ext>
             </a:extLst>
           </p:cNvPr>
@@ -3539,7 +3705,7 @@
           <p:cNvPr id="2" name="headline">
             <a:extLst xmlns:a="http://schemas.openxmlformats.org/drawingml/2006/main">
               <a:ext uri="{FF2B5EF4-FFF2-40B4-BE49-F238E27FC236}">
-                <a16:creationId xmlns:a16="http://schemas.microsoft.com/office/drawing/2014/main" id="{8960E916-6FA5-46F4-A276-E1A2FD1B93D2}"/>
+                <a16:creationId xmlns:a16="http://schemas.microsoft.com/office/drawing/2014/main" id="{CF37DD6B-6335-4E35-96DB-C6A834CABC95}"/>
               </a:ext>
             </a:extLst>
           </p:cNvPr>
@@ -3627,7 +3793,7 @@
           <p:cNvPr id="3" name="leftlabel">
             <a:extLst xmlns:a="http://schemas.openxmlformats.org/drawingml/2006/main">
               <a:ext uri="{FF2B5EF4-FFF2-40B4-BE49-F238E27FC236}">
-                <a16:creationId xmlns:a16="http://schemas.microsoft.com/office/drawing/2014/main" id="{B8E4AA60-CAC6-4852-9C5B-0E9D4846BB66}"/>
+                <a16:creationId xmlns:a16="http://schemas.microsoft.com/office/drawing/2014/main" id="{5298F066-C9BD-4EAA-9044-5EE89C75A496}"/>
               </a:ext>
             </a:extLst>
           </p:cNvPr>
@@ -3688,7 +3854,7 @@
           <p:cNvPr id="4" name="rightlabel">
             <a:extLst xmlns:a="http://schemas.openxmlformats.org/drawingml/2006/main">
               <a:ext uri="{FF2B5EF4-FFF2-40B4-BE49-F238E27FC236}">
-                <a16:creationId xmlns:a16="http://schemas.microsoft.com/office/drawing/2014/main" id="{070D58C8-39D5-428C-AC32-7EB5B5780829}"/>
+                <a16:creationId xmlns:a16="http://schemas.microsoft.com/office/drawing/2014/main" id="{751A8C3D-152F-45C4-89EE-C1F9FBEFF6C5}"/>
               </a:ext>
             </a:extLst>
           </p:cNvPr>
@@ -3749,7 +3915,7 @@
           <p:cNvPr id="5" name="divider-0">
             <a:extLst xmlns:a="http://schemas.openxmlformats.org/drawingml/2006/main">
               <a:ext uri="{FF2B5EF4-FFF2-40B4-BE49-F238E27FC236}">
-                <a16:creationId xmlns:a16="http://schemas.microsoft.com/office/drawing/2014/main" id="{3181A4DE-ABD0-4228-8046-51FB530D401A}"/>
+                <a16:creationId xmlns:a16="http://schemas.microsoft.com/office/drawing/2014/main" id="{06B12AD8-5E07-4702-907E-EC8DE882E678}"/>
               </a:ext>
             </a:extLst>
           </p:cNvPr>
@@ -3779,7 +3945,7 @@
           <p:cNvPr id="6" name="finding-0">
             <a:extLst xmlns:a="http://schemas.openxmlformats.org/drawingml/2006/main">
               <a:ext uri="{FF2B5EF4-FFF2-40B4-BE49-F238E27FC236}">
-                <a16:creationId xmlns:a16="http://schemas.microsoft.com/office/drawing/2014/main" id="{C38E16A2-59F9-4032-A0A8-0BDE725B4F70}"/>
+                <a16:creationId xmlns:a16="http://schemas.microsoft.com/office/drawing/2014/main" id="{33622D16-5CAE-4897-9273-8EBD85D3DBC4}"/>
               </a:ext>
             </a:extLst>
           </p:cNvPr>
@@ -3840,7 +4006,7 @@
           <p:cNvPr id="7" name="revision-0">
             <a:extLst xmlns:a="http://schemas.openxmlformats.org/drawingml/2006/main">
               <a:ext uri="{FF2B5EF4-FFF2-40B4-BE49-F238E27FC236}">
-                <a16:creationId xmlns:a16="http://schemas.microsoft.com/office/drawing/2014/main" id="{596169A2-0CBF-466B-B1F8-20BB6A09D362}"/>
+                <a16:creationId xmlns:a16="http://schemas.microsoft.com/office/drawing/2014/main" id="{2F9CFB2E-EC6E-41DC-B0D0-139AA4E4EAC0}"/>
               </a:ext>
             </a:extLst>
           </p:cNvPr>
@@ -3901,7 +4067,7 @@
           <p:cNvPr id="8" name="divider-1">
             <a:extLst xmlns:a="http://schemas.openxmlformats.org/drawingml/2006/main">
               <a:ext uri="{FF2B5EF4-FFF2-40B4-BE49-F238E27FC236}">
-                <a16:creationId xmlns:a16="http://schemas.microsoft.com/office/drawing/2014/main" id="{F9FFDE70-5CB4-4423-97B2-3DAD0CDF0428}"/>
+                <a16:creationId xmlns:a16="http://schemas.microsoft.com/office/drawing/2014/main" id="{3B81452C-9019-439B-9387-839B104BF59C}"/>
               </a:ext>
             </a:extLst>
           </p:cNvPr>
@@ -3931,7 +4097,7 @@
           <p:cNvPr id="9" name="finding-1">
             <a:extLst xmlns:a="http://schemas.openxmlformats.org/drawingml/2006/main">
               <a:ext uri="{FF2B5EF4-FFF2-40B4-BE49-F238E27FC236}">
-                <a16:creationId xmlns:a16="http://schemas.microsoft.com/office/drawing/2014/main" id="{A0004153-885B-4CC2-AAD3-A579FA8A230B}"/>
+                <a16:creationId xmlns:a16="http://schemas.microsoft.com/office/drawing/2014/main" id="{5ECCB45A-3444-4261-B343-393FE9EA9F6D}"/>
               </a:ext>
             </a:extLst>
           </p:cNvPr>
@@ -3992,7 +4158,7 @@
           <p:cNvPr id="10" name="revision-1">
             <a:extLst xmlns:a="http://schemas.openxmlformats.org/drawingml/2006/main">
               <a:ext uri="{FF2B5EF4-FFF2-40B4-BE49-F238E27FC236}">
-                <a16:creationId xmlns:a16="http://schemas.microsoft.com/office/drawing/2014/main" id="{351230F3-B438-482D-8EB5-7294E07B4C78}"/>
+                <a16:creationId xmlns:a16="http://schemas.microsoft.com/office/drawing/2014/main" id="{CA399592-B422-4A1F-B4FA-663E5B1C3ACE}"/>
               </a:ext>
             </a:extLst>
           </p:cNvPr>
@@ -4053,7 +4219,7 @@
           <p:cNvPr id="11" name="divider-2">
             <a:extLst xmlns:a="http://schemas.openxmlformats.org/drawingml/2006/main">
               <a:ext uri="{FF2B5EF4-FFF2-40B4-BE49-F238E27FC236}">
-                <a16:creationId xmlns:a16="http://schemas.microsoft.com/office/drawing/2014/main" id="{AA1EE36A-8A32-41DA-B92B-CC9D7CD04506}"/>
+                <a16:creationId xmlns:a16="http://schemas.microsoft.com/office/drawing/2014/main" id="{DEA640D7-BC70-4FDF-B798-23186812AAC1}"/>
               </a:ext>
             </a:extLst>
           </p:cNvPr>
@@ -4083,7 +4249,7 @@
           <p:cNvPr id="12" name="finding-2">
             <a:extLst xmlns:a="http://schemas.openxmlformats.org/drawingml/2006/main">
               <a:ext uri="{FF2B5EF4-FFF2-40B4-BE49-F238E27FC236}">
-                <a16:creationId xmlns:a16="http://schemas.microsoft.com/office/drawing/2014/main" id="{BD7F7CA6-83A8-45A2-9DBB-28DDA22940C9}"/>
+                <a16:creationId xmlns:a16="http://schemas.microsoft.com/office/drawing/2014/main" id="{26AD0452-1A6E-428F-BC35-38AA022DEAD4}"/>
               </a:ext>
             </a:extLst>
           </p:cNvPr>
@@ -4144,7 +4310,7 @@
           <p:cNvPr id="13" name="revision-2">
             <a:extLst xmlns:a="http://schemas.openxmlformats.org/drawingml/2006/main">
               <a:ext uri="{FF2B5EF4-FFF2-40B4-BE49-F238E27FC236}">
-                <a16:creationId xmlns:a16="http://schemas.microsoft.com/office/drawing/2014/main" id="{49DB4DBF-7B86-49A7-AAF7-498048D9DD64}"/>
+                <a16:creationId xmlns:a16="http://schemas.microsoft.com/office/drawing/2014/main" id="{D3033EE5-1100-4B3D-AF53-1C06C20B3222}"/>
               </a:ext>
             </a:extLst>
           </p:cNvPr>
@@ -4205,7 +4371,7 @@
           <p:cNvPr id="14" name="limit">
             <a:extLst xmlns:a="http://schemas.openxmlformats.org/drawingml/2006/main">
               <a:ext uri="{FF2B5EF4-FFF2-40B4-BE49-F238E27FC236}">
-                <a16:creationId xmlns:a16="http://schemas.microsoft.com/office/drawing/2014/main" id="{A2FEE527-E3BE-46C2-8D49-6E76A2839C52}"/>
+                <a16:creationId xmlns:a16="http://schemas.microsoft.com/office/drawing/2014/main" id="{985E0F71-8FE4-43EC-B5A3-05DF6D94DCB4}"/>
               </a:ext>
             </a:extLst>
           </p:cNvPr>
@@ -4266,7 +4432,7 @@
           <p:cNvPr id="15" name="slide-number">
             <a:extLst xmlns:a="http://schemas.openxmlformats.org/drawingml/2006/main">
               <a:ext uri="{FF2B5EF4-FFF2-40B4-BE49-F238E27FC236}">
-                <a16:creationId xmlns:a16="http://schemas.microsoft.com/office/drawing/2014/main" id="{3966E27C-C1DF-4A5C-A947-3A3CCA818621}"/>
+                <a16:creationId xmlns:a16="http://schemas.microsoft.com/office/drawing/2014/main" id="{56A1955E-8216-4058-80C2-CEB41576D0DE}"/>
               </a:ext>
             </a:extLst>
           </p:cNvPr>
@@ -4325,7 +4491,7 @@
     </p:spTree>
     <p:extLst>
       <p:ext uri="{BB962C8B-B14F-4D97-AF65-F5344CB8AC3E}">
-        <p14:creationId xmlns:p14="http://schemas.microsoft.com/office/powerpoint/2010/main" val="193808746"/>
+        <p14:creationId xmlns:p14="http://schemas.microsoft.com/office/powerpoint/2010/main" val="1534857831"/>
       </p:ext>
     </p:extLst>
   </p:cSld>
@@ -4356,7 +4522,7 @@
           <p:cNvPr id="8" name="section-label">
             <a:extLst xmlns:a="http://schemas.openxmlformats.org/drawingml/2006/main">
               <a:ext uri="{FF2B5EF4-FFF2-40B4-BE49-F238E27FC236}">
-                <a16:creationId xmlns:a16="http://schemas.microsoft.com/office/drawing/2014/main" id="{DE40BCEF-5F5B-4F33-99F8-FA59217E8420}"/>
+                <a16:creationId xmlns:a16="http://schemas.microsoft.com/office/drawing/2014/main" id="{B1475640-09FE-4125-8E1B-64166DB1B3EB}"/>
               </a:ext>
             </a:extLst>
           </p:cNvPr>
@@ -4417,7 +4583,7 @@
           <p:cNvPr id="2" name="headline">
             <a:extLst xmlns:a="http://schemas.openxmlformats.org/drawingml/2006/main">
               <a:ext uri="{FF2B5EF4-FFF2-40B4-BE49-F238E27FC236}">
-                <a16:creationId xmlns:a16="http://schemas.microsoft.com/office/drawing/2014/main" id="{DD2E1B9D-3B4A-4A3D-8D82-D6439789E31B}"/>
+                <a16:creationId xmlns:a16="http://schemas.microsoft.com/office/drawing/2014/main" id="{27185D88-2128-4517-B9B1-F12147597EDF}"/>
               </a:ext>
             </a:extLst>
           </p:cNvPr>
@@ -4505,7 +4671,7 @@
           <p:cNvPr id="3" name="workshop">
             <a:extLst xmlns:a="http://schemas.openxmlformats.org/drawingml/2006/main">
               <a:ext uri="{FF2B5EF4-FFF2-40B4-BE49-F238E27FC236}">
-                <a16:creationId xmlns:a16="http://schemas.microsoft.com/office/drawing/2014/main" id="{7D0A62DB-7422-441A-AE53-B65AFB17974C}"/>
+                <a16:creationId xmlns:a16="http://schemas.microsoft.com/office/drawing/2014/main" id="{1BC9D436-E67A-4542-A4DD-D45B957F410A}"/>
               </a:ext>
             </a:extLst>
           </p:cNvPr>
@@ -4566,7 +4732,7 @@
           <p:cNvPr id="4" name="credit">
             <a:extLst xmlns:a="http://schemas.openxmlformats.org/drawingml/2006/main">
               <a:ext uri="{FF2B5EF4-FFF2-40B4-BE49-F238E27FC236}">
-                <a16:creationId xmlns:a16="http://schemas.microsoft.com/office/drawing/2014/main" id="{FACC124B-F0AB-441B-8F85-498EBD8B860E}"/>
+                <a16:creationId xmlns:a16="http://schemas.microsoft.com/office/drawing/2014/main" id="{1107A757-6B99-46C7-9AC4-3EB789240FAA}"/>
               </a:ext>
             </a:extLst>
           </p:cNvPr>
@@ -4631,7 +4797,7 @@
           <p:nvPr/>
         </p:nvPicPr>
         <p:blipFill>
-          <a:blip xmlns:r="http://schemas.openxmlformats.org/officeDocument/2006/relationships" xmlns:a="http://schemas.openxmlformats.org/drawingml/2006/main" r:embed="R7016cde8d6f94fe8"/>
+          <a:blip xmlns:r="http://schemas.openxmlformats.org/officeDocument/2006/relationships" xmlns:a="http://schemas.openxmlformats.org/drawingml/2006/main" r:embed="R1709b40857384fae"/>
           <a:stretch xmlns:a="http://schemas.openxmlformats.org/drawingml/2006/main"/>
         </p:blipFill>
         <p:spPr>
@@ -4649,7 +4815,7 @@
           <p:cNvPr id="6" name="caption">
             <a:extLst xmlns:a="http://schemas.openxmlformats.org/drawingml/2006/main">
               <a:ext uri="{FF2B5EF4-FFF2-40B4-BE49-F238E27FC236}">
-                <a16:creationId xmlns:a16="http://schemas.microsoft.com/office/drawing/2014/main" id="{6A892703-5F61-4CD3-A2F8-C97A3566FAFB}"/>
+                <a16:creationId xmlns:a16="http://schemas.microsoft.com/office/drawing/2014/main" id="{EEE848F6-7A14-405E-9E69-D628CDA8469F}"/>
               </a:ext>
             </a:extLst>
           </p:cNvPr>
@@ -4710,7 +4876,7 @@
           <p:cNvPr id="7" name="slide-number">
             <a:extLst xmlns:a="http://schemas.openxmlformats.org/drawingml/2006/main">
               <a:ext uri="{FF2B5EF4-FFF2-40B4-BE49-F238E27FC236}">
-                <a16:creationId xmlns:a16="http://schemas.microsoft.com/office/drawing/2014/main" id="{B9E97800-3890-48D0-BEAA-DAA3A754AE70}"/>
+                <a16:creationId xmlns:a16="http://schemas.microsoft.com/office/drawing/2014/main" id="{53556399-84A0-4858-9BC5-1D37DB03C436}"/>
               </a:ext>
             </a:extLst>
           </p:cNvPr>
@@ -4769,7 +4935,7 @@
     </p:spTree>
     <p:extLst>
       <p:ext uri="{BB962C8B-B14F-4D97-AF65-F5344CB8AC3E}">
-        <p14:creationId xmlns:p14="http://schemas.microsoft.com/office/powerpoint/2010/main" val="264111087"/>
+        <p14:creationId xmlns:p14="http://schemas.microsoft.com/office/powerpoint/2010/main" val="1423011227"/>
       </p:ext>
     </p:extLst>
   </p:cSld>
@@ -4800,7 +4966,7 @@
           <p:cNvPr id="15" name="section-label">
             <a:extLst xmlns:a="http://schemas.openxmlformats.org/drawingml/2006/main">
               <a:ext uri="{FF2B5EF4-FFF2-40B4-BE49-F238E27FC236}">
-                <a16:creationId xmlns:a16="http://schemas.microsoft.com/office/drawing/2014/main" id="{EB3A2B7B-3828-40AB-B90D-DB2F3875514A}"/>
+                <a16:creationId xmlns:a16="http://schemas.microsoft.com/office/drawing/2014/main" id="{21E0F916-3979-4438-9810-170ED22FAFB3}"/>
               </a:ext>
             </a:extLst>
           </p:cNvPr>
@@ -4861,7 +5027,7 @@
           <p:cNvPr id="2" name="headline">
             <a:extLst xmlns:a="http://schemas.openxmlformats.org/drawingml/2006/main">
               <a:ext uri="{FF2B5EF4-FFF2-40B4-BE49-F238E27FC236}">
-                <a16:creationId xmlns:a16="http://schemas.microsoft.com/office/drawing/2014/main" id="{3158B005-3F86-4EA6-A22D-AABE23CB92B3}"/>
+                <a16:creationId xmlns:a16="http://schemas.microsoft.com/office/drawing/2014/main" id="{B6E8BDAA-7EA4-467E-9ED3-ACE0D5000C29}"/>
               </a:ext>
             </a:extLst>
           </p:cNvPr>
@@ -4949,7 +5115,7 @@
           <p:cNvPr id="3" name="n0">
             <a:extLst xmlns:a="http://schemas.openxmlformats.org/drawingml/2006/main">
               <a:ext uri="{FF2B5EF4-FFF2-40B4-BE49-F238E27FC236}">
-                <a16:creationId xmlns:a16="http://schemas.microsoft.com/office/drawing/2014/main" id="{AE54DE93-AA4F-423C-9FDB-86E282B4A37F}"/>
+                <a16:creationId xmlns:a16="http://schemas.microsoft.com/office/drawing/2014/main" id="{11BF2088-9092-445D-B82F-FB7FD56E9C32}"/>
               </a:ext>
             </a:extLst>
           </p:cNvPr>
@@ -5010,7 +5176,7 @@
           <p:cNvPr id="4" name="stage0">
             <a:extLst xmlns:a="http://schemas.openxmlformats.org/drawingml/2006/main">
               <a:ext uri="{FF2B5EF4-FFF2-40B4-BE49-F238E27FC236}">
-                <a16:creationId xmlns:a16="http://schemas.microsoft.com/office/drawing/2014/main" id="{0C4AA18A-CAB5-4ECA-8B3C-7564D8150860}"/>
+                <a16:creationId xmlns:a16="http://schemas.microsoft.com/office/drawing/2014/main" id="{FAAC7A58-297E-46B6-971B-D50331F7B8E6}"/>
               </a:ext>
             </a:extLst>
           </p:cNvPr>
@@ -5071,7 +5237,7 @@
           <p:cNvPr id="5" name="task0">
             <a:extLst xmlns:a="http://schemas.openxmlformats.org/drawingml/2006/main">
               <a:ext uri="{FF2B5EF4-FFF2-40B4-BE49-F238E27FC236}">
-                <a16:creationId xmlns:a16="http://schemas.microsoft.com/office/drawing/2014/main" id="{53CBDFBE-24C4-4F4D-9C9E-7D604FC1E574}"/>
+                <a16:creationId xmlns:a16="http://schemas.microsoft.com/office/drawing/2014/main" id="{E815021C-E031-4165-A8C2-86863ACF8F32}"/>
               </a:ext>
             </a:extLst>
           </p:cNvPr>
@@ -5132,7 +5298,7 @@
           <p:cNvPr id="6" name="n1">
             <a:extLst xmlns:a="http://schemas.openxmlformats.org/drawingml/2006/main">
               <a:ext uri="{FF2B5EF4-FFF2-40B4-BE49-F238E27FC236}">
-                <a16:creationId xmlns:a16="http://schemas.microsoft.com/office/drawing/2014/main" id="{9B4A1BD4-0BA4-4F50-A99D-931EF136D944}"/>
+                <a16:creationId xmlns:a16="http://schemas.microsoft.com/office/drawing/2014/main" id="{AB1FBBC5-17C2-46D9-B8C3-52B2DC368EE1}"/>
               </a:ext>
             </a:extLst>
           </p:cNvPr>
@@ -5193,7 +5359,7 @@
           <p:cNvPr id="7" name="stage1">
             <a:extLst xmlns:a="http://schemas.openxmlformats.org/drawingml/2006/main">
               <a:ext uri="{FF2B5EF4-FFF2-40B4-BE49-F238E27FC236}">
-                <a16:creationId xmlns:a16="http://schemas.microsoft.com/office/drawing/2014/main" id="{CCDB1947-57A1-4B77-853A-568CD5E9B5AF}"/>
+                <a16:creationId xmlns:a16="http://schemas.microsoft.com/office/drawing/2014/main" id="{EEE187E2-1919-465B-8421-D43D81040F53}"/>
               </a:ext>
             </a:extLst>
           </p:cNvPr>
@@ -5254,7 +5420,7 @@
           <p:cNvPr id="8" name="task1">
             <a:extLst xmlns:a="http://schemas.openxmlformats.org/drawingml/2006/main">
               <a:ext uri="{FF2B5EF4-FFF2-40B4-BE49-F238E27FC236}">
-                <a16:creationId xmlns:a16="http://schemas.microsoft.com/office/drawing/2014/main" id="{BA4BFEA4-1AF1-4EA5-AFBD-B25A252CBCA1}"/>
+                <a16:creationId xmlns:a16="http://schemas.microsoft.com/office/drawing/2014/main" id="{3F3A67F8-4EEF-4423-BC40-F8F11D2A179E}"/>
               </a:ext>
             </a:extLst>
           </p:cNvPr>
@@ -5315,7 +5481,7 @@
           <p:cNvPr id="9" name="n2">
             <a:extLst xmlns:a="http://schemas.openxmlformats.org/drawingml/2006/main">
               <a:ext uri="{FF2B5EF4-FFF2-40B4-BE49-F238E27FC236}">
-                <a16:creationId xmlns:a16="http://schemas.microsoft.com/office/drawing/2014/main" id="{3BBC283E-3DA9-4D9F-9A44-E1914675D50A}"/>
+                <a16:creationId xmlns:a16="http://schemas.microsoft.com/office/drawing/2014/main" id="{3A1236CF-5A49-4052-A4DA-802826377AD3}"/>
               </a:ext>
             </a:extLst>
           </p:cNvPr>
@@ -5376,7 +5542,7 @@
           <p:cNvPr id="10" name="stage2">
             <a:extLst xmlns:a="http://schemas.openxmlformats.org/drawingml/2006/main">
               <a:ext uri="{FF2B5EF4-FFF2-40B4-BE49-F238E27FC236}">
-                <a16:creationId xmlns:a16="http://schemas.microsoft.com/office/drawing/2014/main" id="{170CA65F-C9F8-42A8-8883-F6DD2881C261}"/>
+                <a16:creationId xmlns:a16="http://schemas.microsoft.com/office/drawing/2014/main" id="{309011C8-8D82-4BE0-B60F-13CF371F9821}"/>
               </a:ext>
             </a:extLst>
           </p:cNvPr>
@@ -5437,7 +5603,7 @@
           <p:cNvPr id="11" name="task2">
             <a:extLst xmlns:a="http://schemas.openxmlformats.org/drawingml/2006/main">
               <a:ext uri="{FF2B5EF4-FFF2-40B4-BE49-F238E27FC236}">
-                <a16:creationId xmlns:a16="http://schemas.microsoft.com/office/drawing/2014/main" id="{F187D168-7E24-4FCC-BEE2-026F0ACB687C}"/>
+                <a16:creationId xmlns:a16="http://schemas.microsoft.com/office/drawing/2014/main" id="{1B6F9258-4E18-4EDB-A9E7-2D603EF3E711}"/>
               </a:ext>
             </a:extLst>
           </p:cNvPr>
@@ -5502,7 +5668,7 @@
           <p:nvPr/>
         </p:nvPicPr>
         <p:blipFill>
-          <a:blip xmlns:r="http://schemas.openxmlformats.org/officeDocument/2006/relationships" xmlns:a="http://schemas.openxmlformats.org/drawingml/2006/main" r:embed="Rca15fc430813409e"/>
+          <a:blip xmlns:r="http://schemas.openxmlformats.org/officeDocument/2006/relationships" xmlns:a="http://schemas.openxmlformats.org/drawingml/2006/main" r:embed="R08b9f6f09af34ac5"/>
           <a:stretch xmlns:a="http://schemas.openxmlformats.org/drawingml/2006/main"/>
         </p:blipFill>
         <p:spPr>
@@ -5520,7 +5686,7 @@
           <p:cNvPr id="13" name="credit">
             <a:extLst xmlns:a="http://schemas.openxmlformats.org/drawingml/2006/main">
               <a:ext uri="{FF2B5EF4-FFF2-40B4-BE49-F238E27FC236}">
-                <a16:creationId xmlns:a16="http://schemas.microsoft.com/office/drawing/2014/main" id="{9C3A531D-A0CC-4B23-B8D3-B4E3C0FFFB3A}"/>
+                <a16:creationId xmlns:a16="http://schemas.microsoft.com/office/drawing/2014/main" id="{2CF15023-CC3E-423A-932A-489642765731}"/>
               </a:ext>
             </a:extLst>
           </p:cNvPr>
@@ -5608,7 +5774,7 @@
           <p:cNvPr id="14" name="slide-number">
             <a:extLst xmlns:a="http://schemas.openxmlformats.org/drawingml/2006/main">
               <a:ext uri="{FF2B5EF4-FFF2-40B4-BE49-F238E27FC236}">
-                <a16:creationId xmlns:a16="http://schemas.microsoft.com/office/drawing/2014/main" id="{4281D70B-E571-455D-A533-3599AA03CE92}"/>
+                <a16:creationId xmlns:a16="http://schemas.microsoft.com/office/drawing/2014/main" id="{ED0776FB-9086-47DD-B99C-9DB68F2DF835}"/>
               </a:ext>
             </a:extLst>
           </p:cNvPr>
@@ -5667,7 +5833,7 @@
     </p:spTree>
     <p:extLst>
       <p:ext uri="{BB962C8B-B14F-4D97-AF65-F5344CB8AC3E}">
-        <p14:creationId xmlns:p14="http://schemas.microsoft.com/office/powerpoint/2010/main" val="332607535"/>
+        <p14:creationId xmlns:p14="http://schemas.microsoft.com/office/powerpoint/2010/main" val="1384181945"/>
       </p:ext>
     </p:extLst>
   </p:cSld>
@@ -5698,7 +5864,7 @@
           <p:cNvPr id="8" name="section-label">
             <a:extLst xmlns:a="http://schemas.openxmlformats.org/drawingml/2006/main">
               <a:ext uri="{FF2B5EF4-FFF2-40B4-BE49-F238E27FC236}">
-                <a16:creationId xmlns:a16="http://schemas.microsoft.com/office/drawing/2014/main" id="{79580924-988A-4F4F-B63A-DD4581BE8661}"/>
+                <a16:creationId xmlns:a16="http://schemas.microsoft.com/office/drawing/2014/main" id="{E3897CDE-BAA3-4467-9343-57F627E912F1}"/>
               </a:ext>
             </a:extLst>
           </p:cNvPr>
@@ -5759,7 +5925,7 @@
           <p:cNvPr id="2" name="headline">
             <a:extLst xmlns:a="http://schemas.openxmlformats.org/drawingml/2006/main">
               <a:ext uri="{FF2B5EF4-FFF2-40B4-BE49-F238E27FC236}">
-                <a16:creationId xmlns:a16="http://schemas.microsoft.com/office/drawing/2014/main" id="{AEDB6D09-552E-4649-8D78-2F9479FABA5D}"/>
+                <a16:creationId xmlns:a16="http://schemas.microsoft.com/office/drawing/2014/main" id="{84FE99A3-90C5-499C-9DB7-37584F46D70C}"/>
               </a:ext>
             </a:extLst>
           </p:cNvPr>
@@ -5824,7 +5990,7 @@
           <p:nvPr/>
         </p:nvPicPr>
         <p:blipFill>
-          <a:blip xmlns:r="http://schemas.openxmlformats.org/officeDocument/2006/relationships" xmlns:a="http://schemas.openxmlformats.org/drawingml/2006/main" r:embed="R3e13d55361744d90"/>
+          <a:blip xmlns:r="http://schemas.openxmlformats.org/officeDocument/2006/relationships" xmlns:a="http://schemas.openxmlformats.org/drawingml/2006/main" r:embed="Re59a18a96d404e8d"/>
           <a:stretch xmlns:a="http://schemas.openxmlformats.org/drawingml/2006/main"/>
         </p:blipFill>
         <p:spPr>
@@ -5842,7 +6008,7 @@
           <p:cNvPr id="4" name="interpretation">
             <a:extLst xmlns:a="http://schemas.openxmlformats.org/drawingml/2006/main">
               <a:ext uri="{FF2B5EF4-FFF2-40B4-BE49-F238E27FC236}">
-                <a16:creationId xmlns:a16="http://schemas.microsoft.com/office/drawing/2014/main" id="{5BE37BC0-1305-4BB2-B0C8-760304E1CC86}"/>
+                <a16:creationId xmlns:a16="http://schemas.microsoft.com/office/drawing/2014/main" id="{0ED52C36-7139-470B-A401-D7CE5F732B7C}"/>
               </a:ext>
             </a:extLst>
           </p:cNvPr>
@@ -5930,7 +6096,7 @@
           <p:cNvPr id="5" name="result">
             <a:extLst xmlns:a="http://schemas.openxmlformats.org/drawingml/2006/main">
               <a:ext uri="{FF2B5EF4-FFF2-40B4-BE49-F238E27FC236}">
-                <a16:creationId xmlns:a16="http://schemas.microsoft.com/office/drawing/2014/main" id="{1B9324FC-D613-4F43-9DCF-260440B20EDE}"/>
+                <a16:creationId xmlns:a16="http://schemas.microsoft.com/office/drawing/2014/main" id="{02DF5537-F94E-4468-B0CD-8471C2BAE6B9}"/>
               </a:ext>
             </a:extLst>
           </p:cNvPr>
@@ -5991,7 +6157,7 @@
           <p:cNvPr id="6" name="boundary">
             <a:extLst xmlns:a="http://schemas.openxmlformats.org/drawingml/2006/main">
               <a:ext uri="{FF2B5EF4-FFF2-40B4-BE49-F238E27FC236}">
-                <a16:creationId xmlns:a16="http://schemas.microsoft.com/office/drawing/2014/main" id="{49549876-266F-4296-B0E5-4A2DCE7CE6FA}"/>
+                <a16:creationId xmlns:a16="http://schemas.microsoft.com/office/drawing/2014/main" id="{E1BF88A3-2376-49B6-A522-4F6DC5A8678C}"/>
               </a:ext>
             </a:extLst>
           </p:cNvPr>
@@ -6052,7 +6218,7 @@
           <p:cNvPr id="7" name="slide-number">
             <a:extLst xmlns:a="http://schemas.openxmlformats.org/drawingml/2006/main">
               <a:ext uri="{FF2B5EF4-FFF2-40B4-BE49-F238E27FC236}">
-                <a16:creationId xmlns:a16="http://schemas.microsoft.com/office/drawing/2014/main" id="{447BCF92-8E9B-4377-9265-F2804AD245CB}"/>
+                <a16:creationId xmlns:a16="http://schemas.microsoft.com/office/drawing/2014/main" id="{9DE19305-E59E-457E-BD13-5DE5CDCD2464}"/>
               </a:ext>
             </a:extLst>
           </p:cNvPr>
@@ -6111,7 +6277,7 @@
     </p:spTree>
     <p:extLst>
       <p:ext uri="{BB962C8B-B14F-4D97-AF65-F5344CB8AC3E}">
-        <p14:creationId xmlns:p14="http://schemas.microsoft.com/office/powerpoint/2010/main" val="1523137932"/>
+        <p14:creationId xmlns:p14="http://schemas.microsoft.com/office/powerpoint/2010/main" val="1997284833"/>
       </p:ext>
     </p:extLst>
   </p:cSld>
@@ -6142,7 +6308,7 @@
           <p:cNvPr id="8" name="section-label">
             <a:extLst xmlns:a="http://schemas.openxmlformats.org/drawingml/2006/main">
               <a:ext uri="{FF2B5EF4-FFF2-40B4-BE49-F238E27FC236}">
-                <a16:creationId xmlns:a16="http://schemas.microsoft.com/office/drawing/2014/main" id="{15D45579-A1E7-4D63-A2B3-D76C26B01922}"/>
+                <a16:creationId xmlns:a16="http://schemas.microsoft.com/office/drawing/2014/main" id="{5BC0639D-0D63-4337-8C4F-95275A2B8DB2}"/>
               </a:ext>
             </a:extLst>
           </p:cNvPr>
@@ -6203,19 +6369,19 @@
           <p:cNvPr id="2" name="headline">
             <a:extLst xmlns:a="http://schemas.openxmlformats.org/drawingml/2006/main">
               <a:ext uri="{FF2B5EF4-FFF2-40B4-BE49-F238E27FC236}">
-                <a16:creationId xmlns:a16="http://schemas.microsoft.com/office/drawing/2014/main" id="{668FECA2-A920-46B5-ABE1-59B0F2619CCD}"/>
-              </a:ext>
-            </a:extLst>
-          </p:cNvPr>
-          <p:cNvSpPr>
-            <a:spLocks xmlns:a="http://schemas.openxmlformats.org/drawingml/2006/main" noGrp="1"/>
-          </p:cNvSpPr>
-          <p:nvPr/>
-        </p:nvSpPr>
-        <p:spPr>
-          <a:xfrm xmlns:a="http://schemas.openxmlformats.org/drawingml/2006/main">
-            <a:off x="609600" y="1104900"/>
-            <a:ext cx="6334125" cy="1524000"/>
+                <a16:creationId xmlns:a16="http://schemas.microsoft.com/office/drawing/2014/main" id="{39161E23-DEF9-45C2-B728-ABA0D690AB9D}"/>
+              </a:ext>
+            </a:extLst>
+          </p:cNvPr>
+          <p:cNvSpPr>
+            <a:spLocks xmlns:a="http://schemas.openxmlformats.org/drawingml/2006/main" noGrp="1"/>
+          </p:cNvSpPr>
+          <p:nvPr/>
+        </p:nvSpPr>
+        <p:spPr>
+          <a:xfrm xmlns:a="http://schemas.openxmlformats.org/drawingml/2006/main">
+            <a:off x="609600" y="1095375"/>
+            <a:ext cx="10953750" cy="800100"/>
           </a:xfrm>
           <a:prstGeom xmlns:a="http://schemas.openxmlformats.org/drawingml/2006/main" prst="rect">
             <a:avLst/>
@@ -6236,7 +6402,7 @@
                 <a:spcPct val="110000"/>
               </a:lnSpc>
               <a:buNone/>
-              <a:defRPr sz="3750" b="1">
+              <a:defRPr sz="3675" b="1">
                 <a:solidFill>
                   <a:srgbClr val="192B25"/>
                 </a:solidFill>
@@ -6246,7 +6412,7 @@
               </a:defRPr>
             </a:pPr>
             <a:r>
-              <a:rPr sz="3750" b="1">
+              <a:rPr sz="3675" b="1">
                 <a:solidFill>
                   <a:srgbClr val="192B25"/>
                 </a:solidFill>
@@ -6254,34 +6420,7 @@
                 <a:ea typeface="Helvetica Neue"/>
                 <a:cs typeface="Helvetica Neue"/>
               </a:rPr>
-              <a:t>Keep a mentor</a:t>
-            </a:r>
-          </a:p>
-          <a:p xmlns:a="http://schemas.openxmlformats.org/drawingml/2006/main">
-            <a:pPr>
-              <a:lnSpc>
-                <a:spcPct val="110000"/>
-              </a:lnSpc>
-              <a:buNone/>
-              <a:defRPr sz="3750" b="1">
-                <a:solidFill>
-                  <a:srgbClr val="192B25"/>
-                </a:solidFill>
-                <a:latin typeface="Helvetica Neue"/>
-                <a:ea typeface="Helvetica Neue"/>
-                <a:cs typeface="Helvetica Neue"/>
-              </a:defRPr>
-            </a:pPr>
-            <a:r>
-              <a:rPr sz="3750" b="1">
-                <a:solidFill>
-                  <a:srgbClr val="192B25"/>
-                </a:solidFill>
-                <a:latin typeface="Helvetica Neue"/>
-                <a:ea typeface="Helvetica Neue"/>
-                <a:cs typeface="Helvetica Neue"/>
-              </a:rPr>
-              <a:t>in the learning loop</a:t>
+              <a:t>Keep a mentor in the learning loop</a:t>
             </a:r>
           </a:p>
         </p:txBody>
@@ -6291,19 +6430,19 @@
           <p:cNvPr id="3" name="proposal">
             <a:extLst xmlns:a="http://schemas.openxmlformats.org/drawingml/2006/main">
               <a:ext uri="{FF2B5EF4-FFF2-40B4-BE49-F238E27FC236}">
-                <a16:creationId xmlns:a16="http://schemas.microsoft.com/office/drawing/2014/main" id="{00C074F2-AC22-49D6-9D80-BE8846D8F4AC}"/>
-              </a:ext>
-            </a:extLst>
-          </p:cNvPr>
-          <p:cNvSpPr>
-            <a:spLocks xmlns:a="http://schemas.openxmlformats.org/drawingml/2006/main" noGrp="1"/>
-          </p:cNvSpPr>
-          <p:nvPr/>
-        </p:nvSpPr>
-        <p:spPr>
-          <a:xfrm xmlns:a="http://schemas.openxmlformats.org/drawingml/2006/main">
-            <a:off x="609600" y="3362325"/>
-            <a:ext cx="6086475" cy="1190625"/>
+                <a16:creationId xmlns:a16="http://schemas.microsoft.com/office/drawing/2014/main" id="{671073EA-D899-4F92-B058-D830E3B79C04}"/>
+              </a:ext>
+            </a:extLst>
+          </p:cNvPr>
+          <p:cNvSpPr>
+            <a:spLocks xmlns:a="http://schemas.openxmlformats.org/drawingml/2006/main" noGrp="1"/>
+          </p:cNvSpPr>
+          <p:nvPr/>
+        </p:nvSpPr>
+        <p:spPr>
+          <a:xfrm xmlns:a="http://schemas.openxmlformats.org/drawingml/2006/main">
+            <a:off x="609600" y="2390775"/>
+            <a:ext cx="3105150" cy="1571625"/>
           </a:xfrm>
           <a:prstGeom xmlns:a="http://schemas.openxmlformats.org/drawingml/2006/main" prst="rect">
             <a:avLst/>
@@ -6324,7 +6463,7 @@
                 <a:spcPct val="110000"/>
               </a:lnSpc>
               <a:buNone/>
-              <a:defRPr sz="2025" b="0">
+              <a:defRPr sz="1950" b="0">
                 <a:solidFill>
                   <a:srgbClr val="192B25"/>
                 </a:solidFill>
@@ -6334,7 +6473,7 @@
               </a:defRPr>
             </a:pPr>
             <a:r>
-              <a:rPr sz="2025" b="0">
+              <a:rPr sz="1950" b="0">
                 <a:solidFill>
                   <a:srgbClr val="192B25"/>
                 </a:solidFill>
@@ -6342,7 +6481,7 @@
                 <a:ea typeface="Helvetica Neue"/>
                 <a:cs typeface="Helvetica Neue"/>
               </a:rPr>
-              <a:t>I proposed human review before learner context became a generated task—and again before that task reached the learner.</a:t>
+              <a:t>I proposed two human reviews: first the learner context, then the generated task.</a:t>
             </a:r>
           </a:p>
         </p:txBody>
@@ -6352,19 +6491,19 @@
           <p:cNvPr id="4" name="stage">
             <a:extLst xmlns:a="http://schemas.openxmlformats.org/drawingml/2006/main">
               <a:ext uri="{FF2B5EF4-FFF2-40B4-BE49-F238E27FC236}">
-                <a16:creationId xmlns:a16="http://schemas.microsoft.com/office/drawing/2014/main" id="{DAF50070-D787-4878-B5CB-3AC42B15A895}"/>
-              </a:ext>
-            </a:extLst>
-          </p:cNvPr>
-          <p:cNvSpPr>
-            <a:spLocks xmlns:a="http://schemas.openxmlformats.org/drawingml/2006/main" noGrp="1"/>
-          </p:cNvSpPr>
-          <p:nvPr/>
-        </p:nvSpPr>
-        <p:spPr>
-          <a:xfrm xmlns:a="http://schemas.openxmlformats.org/drawingml/2006/main">
-            <a:off x="609600" y="5295900"/>
-            <a:ext cx="6010275" cy="742950"/>
+                <a16:creationId xmlns:a16="http://schemas.microsoft.com/office/drawing/2014/main" id="{DE608EFC-C64B-4ED2-AF75-647B866C3D84}"/>
+              </a:ext>
+            </a:extLst>
+          </p:cNvPr>
+          <p:cNvSpPr>
+            <a:spLocks xmlns:a="http://schemas.openxmlformats.org/drawingml/2006/main" noGrp="1"/>
+          </p:cNvSpPr>
+          <p:nvPr/>
+        </p:nvSpPr>
+        <p:spPr>
+          <a:xfrm xmlns:a="http://schemas.openxmlformats.org/drawingml/2006/main">
+            <a:off x="609600" y="4848225"/>
+            <a:ext cx="3105150" cy="1066800"/>
           </a:xfrm>
           <a:prstGeom xmlns:a="http://schemas.openxmlformats.org/drawingml/2006/main" prst="rect">
             <a:avLst/>
@@ -6385,7 +6524,7 @@
                 <a:spcPct val="110000"/>
               </a:lnSpc>
               <a:buNone/>
-              <a:defRPr sz="1725" b="0">
+              <a:defRPr sz="1650" b="0">
                 <a:solidFill>
                   <a:srgbClr val="58645D"/>
                 </a:solidFill>
@@ -6395,7 +6534,7 @@
               </a:defRPr>
             </a:pPr>
             <a:r>
-              <a:rPr sz="1725" b="0">
+              <a:rPr sz="1650" b="0">
                 <a:solidFill>
                   <a:srgbClr val="58645D"/>
                 </a:solidFill>
@@ -6403,7 +6542,34 @@
                 <a:ea typeface="Helvetica Neue"/>
                 <a:cs typeface="Helvetica Neue"/>
               </a:rPr>
-              <a:t>Design proposal. Deployment, learner outcomes, and time savings were not established.</a:t>
+              <a:t>2024 design proposal.</a:t>
+            </a:r>
+          </a:p>
+          <a:p xmlns:a="http://schemas.openxmlformats.org/drawingml/2006/main">
+            <a:pPr>
+              <a:lnSpc>
+                <a:spcPct val="110000"/>
+              </a:lnSpc>
+              <a:buNone/>
+              <a:defRPr sz="1650" b="0">
+                <a:solidFill>
+                  <a:srgbClr val="58645D"/>
+                </a:solidFill>
+                <a:latin typeface="Helvetica Neue"/>
+                <a:ea typeface="Helvetica Neue"/>
+                <a:cs typeface="Helvetica Neue"/>
+              </a:defRPr>
+            </a:pPr>
+            <a:r>
+              <a:rPr sz="1650" b="0">
+                <a:solidFill>
+                  <a:srgbClr val="58645D"/>
+                </a:solidFill>
+                <a:latin typeface="Helvetica Neue"/>
+                <a:ea typeface="Helvetica Neue"/>
+                <a:cs typeface="Helvetica Neue"/>
+              </a:rPr>
+              <a:t>Deployment and learner outcomes were not established.</a:t>
             </a:r>
           </a:p>
         </p:txBody>
@@ -6417,13 +6583,13 @@
           <p:nvPr/>
         </p:nvPicPr>
         <p:blipFill>
-          <a:blip xmlns:r="http://schemas.openxmlformats.org/officeDocument/2006/relationships" xmlns:a="http://schemas.openxmlformats.org/drawingml/2006/main" r:embed="R0e049b48a4f74e62"/>
+          <a:blip xmlns:r="http://schemas.openxmlformats.org/officeDocument/2006/relationships" xmlns:a="http://schemas.openxmlformats.org/drawingml/2006/main" r:embed="Rf7e0cf28dcc447e1"/>
           <a:stretch xmlns:a="http://schemas.openxmlformats.org/drawingml/2006/main"/>
         </p:blipFill>
         <p:spPr>
           <a:xfrm xmlns:a="http://schemas.openxmlformats.org/drawingml/2006/main">
-            <a:off x="8490146" y="1419225"/>
-            <a:ext cx="2422133" cy="4686300"/>
+            <a:off x="4229100" y="2059678"/>
+            <a:ext cx="7353300" cy="4395995"/>
           </a:xfrm>
           <a:prstGeom xmlns:a="http://schemas.openxmlformats.org/drawingml/2006/main" prst="rect">
             <a:avLst/>
@@ -6435,19 +6601,19 @@
           <p:cNvPr id="6" name="reconstruction">
             <a:extLst xmlns:a="http://schemas.openxmlformats.org/drawingml/2006/main">
               <a:ext uri="{FF2B5EF4-FFF2-40B4-BE49-F238E27FC236}">
-                <a16:creationId xmlns:a16="http://schemas.microsoft.com/office/drawing/2014/main" id="{CB715956-AC49-437F-9D4F-943B87925084}"/>
-              </a:ext>
-            </a:extLst>
-          </p:cNvPr>
-          <p:cNvSpPr>
-            <a:spLocks xmlns:a="http://schemas.openxmlformats.org/drawingml/2006/main" noGrp="1"/>
-          </p:cNvSpPr>
-          <p:nvPr/>
-        </p:nvSpPr>
-        <p:spPr>
-          <a:xfrm xmlns:a="http://schemas.openxmlformats.org/drawingml/2006/main">
-            <a:off x="7734300" y="6324600"/>
-            <a:ext cx="3857625" cy="247650"/>
+                <a16:creationId xmlns:a16="http://schemas.microsoft.com/office/drawing/2014/main" id="{8A0B3193-8468-4197-8330-0D3F8A18085E}"/>
+              </a:ext>
+            </a:extLst>
+          </p:cNvPr>
+          <p:cNvSpPr>
+            <a:spLocks xmlns:a="http://schemas.openxmlformats.org/drawingml/2006/main" noGrp="1"/>
+          </p:cNvSpPr>
+          <p:nvPr/>
+        </p:nvSpPr>
+        <p:spPr>
+          <a:xfrm xmlns:a="http://schemas.openxmlformats.org/drawingml/2006/main">
+            <a:off x="4229100" y="6467475"/>
+            <a:ext cx="7067550" cy="228600"/>
           </a:xfrm>
           <a:prstGeom xmlns:a="http://schemas.openxmlformats.org/drawingml/2006/main" prst="rect">
             <a:avLst/>
@@ -6486,7 +6652,7 @@
                 <a:ea typeface="Helvetica Neue"/>
                 <a:cs typeface="Helvetica Neue"/>
               </a:rPr>
-              <a:t>Selected reconstruction of my proposal</a:t>
+              <a:t>Simplified reconstruction of my documented proposal</a:t>
             </a:r>
           </a:p>
         </p:txBody>
@@ -6496,7 +6662,7 @@
           <p:cNvPr id="7" name="slide-number">
             <a:extLst xmlns:a="http://schemas.openxmlformats.org/drawingml/2006/main">
               <a:ext uri="{FF2B5EF4-FFF2-40B4-BE49-F238E27FC236}">
-                <a16:creationId xmlns:a16="http://schemas.microsoft.com/office/drawing/2014/main" id="{578FA495-24E5-4F25-B524-07E56E0782CD}"/>
+                <a16:creationId xmlns:a16="http://schemas.microsoft.com/office/drawing/2014/main" id="{26BD0E89-E5C2-47AB-AD61-D0548DCD2618}"/>
               </a:ext>
             </a:extLst>
           </p:cNvPr>
@@ -6555,7 +6721,7 @@
     </p:spTree>
     <p:extLst>
       <p:ext uri="{BB962C8B-B14F-4D97-AF65-F5344CB8AC3E}">
-        <p14:creationId xmlns:p14="http://schemas.microsoft.com/office/powerpoint/2010/main" val="1330165772"/>
+        <p14:creationId xmlns:p14="http://schemas.microsoft.com/office/powerpoint/2010/main" val="1756115097"/>
       </p:ext>
     </p:extLst>
   </p:cSld>
@@ -6586,7 +6752,7 @@
           <p:cNvPr id="7" name="section-label">
             <a:extLst xmlns:a="http://schemas.openxmlformats.org/drawingml/2006/main">
               <a:ext uri="{FF2B5EF4-FFF2-40B4-BE49-F238E27FC236}">
-                <a16:creationId xmlns:a16="http://schemas.microsoft.com/office/drawing/2014/main" id="{B34CEDCC-2D79-4377-9B57-B522849FBC97}"/>
+                <a16:creationId xmlns:a16="http://schemas.microsoft.com/office/drawing/2014/main" id="{29E13E22-0A7E-49AF-8C76-84C422407389}"/>
               </a:ext>
             </a:extLst>
           </p:cNvPr>
@@ -6647,7 +6813,7 @@
           <p:cNvPr id="2" name="headline">
             <a:extLst xmlns:a="http://schemas.openxmlformats.org/drawingml/2006/main">
               <a:ext uri="{FF2B5EF4-FFF2-40B4-BE49-F238E27FC236}">
-                <a16:creationId xmlns:a16="http://schemas.microsoft.com/office/drawing/2014/main" id="{DB12BFB1-6BDB-4145-8714-CB35F5FE957D}"/>
+                <a16:creationId xmlns:a16="http://schemas.microsoft.com/office/drawing/2014/main" id="{A1040921-878C-43BE-8E93-6C982B4E1530}"/>
               </a:ext>
             </a:extLst>
           </p:cNvPr>
@@ -6735,7 +6901,7 @@
           <p:cNvPr id="3" name="story">
             <a:extLst xmlns:a="http://schemas.openxmlformats.org/drawingml/2006/main">
               <a:ext uri="{FF2B5EF4-FFF2-40B4-BE49-F238E27FC236}">
-                <a16:creationId xmlns:a16="http://schemas.microsoft.com/office/drawing/2014/main" id="{A260EFB8-5D72-47CC-8B13-59DAC1F21E26}"/>
+                <a16:creationId xmlns:a16="http://schemas.microsoft.com/office/drawing/2014/main" id="{0CA8879D-F210-464A-8CD7-B699F5B56DC2}"/>
               </a:ext>
             </a:extLst>
           </p:cNvPr>
@@ -6796,7 +6962,7 @@
           <p:cNvPr id="4" name="approach">
             <a:extLst xmlns:a="http://schemas.openxmlformats.org/drawingml/2006/main">
               <a:ext uri="{FF2B5EF4-FFF2-40B4-BE49-F238E27FC236}">
-                <a16:creationId xmlns:a16="http://schemas.microsoft.com/office/drawing/2014/main" id="{5AC53C28-E2E8-447A-B3F2-42A442B2A7A2}"/>
+                <a16:creationId xmlns:a16="http://schemas.microsoft.com/office/drawing/2014/main" id="{778CE451-8CD6-4B4E-A5AC-764CEBF948A5}"/>
               </a:ext>
             </a:extLst>
           </p:cNvPr>
@@ -6861,7 +7027,7 @@
           <p:nvPr/>
         </p:nvPicPr>
         <p:blipFill>
-          <a:blip xmlns:r="http://schemas.openxmlformats.org/officeDocument/2006/relationships" xmlns:a="http://schemas.openxmlformats.org/drawingml/2006/main" r:embed="R5142fe8016d445fb"/>
+          <a:blip xmlns:r="http://schemas.openxmlformats.org/officeDocument/2006/relationships" xmlns:a="http://schemas.openxmlformats.org/drawingml/2006/main" r:embed="Re44c2a11a062419a"/>
           <a:stretch xmlns:a="http://schemas.openxmlformats.org/drawingml/2006/main"/>
         </p:blipFill>
         <p:spPr>
@@ -6879,7 +7045,7 @@
           <p:cNvPr id="6" name="slide-number">
             <a:extLst xmlns:a="http://schemas.openxmlformats.org/drawingml/2006/main">
               <a:ext uri="{FF2B5EF4-FFF2-40B4-BE49-F238E27FC236}">
-                <a16:creationId xmlns:a16="http://schemas.microsoft.com/office/drawing/2014/main" id="{1D99399B-0EE8-4AA8-9B6B-0E526CC0C7B8}"/>
+                <a16:creationId xmlns:a16="http://schemas.microsoft.com/office/drawing/2014/main" id="{32071E8B-5146-4F67-AD75-FC3CDF8C53D4}"/>
               </a:ext>
             </a:extLst>
           </p:cNvPr>
@@ -6938,7 +7104,7 @@
     </p:spTree>
     <p:extLst>
       <p:ext uri="{BB962C8B-B14F-4D97-AF65-F5344CB8AC3E}">
-        <p14:creationId xmlns:p14="http://schemas.microsoft.com/office/powerpoint/2010/main" val="1234722231"/>
+        <p14:creationId xmlns:p14="http://schemas.microsoft.com/office/powerpoint/2010/main" val="1685134582"/>
       </p:ext>
     </p:extLst>
   </p:cSld>
